--- a/docs/GlycoTwin_Architecture_Diagram.pptx
+++ b/docs/GlycoTwin_Architecture_Diagram.pptx
@@ -6,6 +6,7 @@
   </p:sldMasterIdLst>
   <p:sldIdLst>
     <p:sldId id="256" r:id="rId7"/>
+    <p:sldId id="257" r:id="rId8"/>
   </p:sldIdLst>
   <p:sldSz cx="12191695" cy="6858000" type="screen4x3"/>
   <p:notesSz cx="6858000" cy="9144000"/>
@@ -3081,6 +3082,14 @@
 <file path=ppt/slides/slide1.xml><?xml version="1.0" encoding="utf-8"?>
 <p:sld xmlns:a="http://schemas.openxmlformats.org/drawingml/2006/main" xmlns:p="http://schemas.openxmlformats.org/presentationml/2006/main" xmlns:r="http://schemas.openxmlformats.org/officeDocument/2006/relationships">
   <p:cSld>
+    <p:bg>
+      <p:bgPr>
+        <a:solidFill>
+          <a:srgbClr val="FFFFFF"/>
+        </a:solidFill>
+        <a:effectLst/>
+      </p:bgPr>
+    </p:bg>
     <p:spTree>
       <p:nvGrpSpPr>
         <p:cNvPr id="1" name=""/>
@@ -3096,8 +3105,8 @@
         </p:nvSpPr>
         <p:spPr>
           <a:xfrm>
-            <a:off x="731520" y="320040"/>
-            <a:ext cx="10698480" cy="914400"/>
+            <a:off x="411480" y="201168"/>
+            <a:ext cx="11338560" cy="548640"/>
           </a:xfrm>
           <a:prstGeom prst="rect">
             <a:avLst/>
@@ -3105,75 +3114,97 @@
           <a:noFill/>
         </p:spPr>
         <p:txBody>
-          <a:bodyPr wrap="none">
-            <a:spAutoFit/>
+          <a:bodyPr wrap="square" lIns="36576" rIns="36576" tIns="36576" bIns="36576" anchor="t">
+            <a:noAutofit/>
           </a:bodyPr>
           <a:lstStyle/>
           <a:p>
-            <a:pPr>
-              <a:defRPr sz="1000" b="1">
-                <a:solidFill>
-                  <a:srgbClr val="0D9488"/>
-                </a:solidFill>
-              </a:defRPr>
+            <a:pPr algn="l">
+              <a:spcAft>
+                <a:spcPts val="0"/>
+              </a:spcAft>
             </a:pPr>
             <a:r>
-              <a:t>GLYCOTWIN SYSTEM ARCHITECTURE · TEAM CLASSY LEOPARDS (GOA INSTITUTE OF MANAGEMENT, SANQUELIM)</a:t>
-            </a:r>
-          </a:p>
-          <a:p>
-            <a:pPr>
-              <a:defRPr sz="1900" b="1">
+              <a:rPr sz="2600" b="1" i="0">
                 <a:solidFill>
                   <a:srgbClr val="0F172A"/>
                 </a:solidFill>
-              </a:defRPr>
+                <a:latin typeface="Calibri"/>
+              </a:rPr>
+              <a:t>GlycoTwin architecture: simulate, train, evaluate, serve</a:t>
+            </a:r>
+          </a:p>
+        </p:txBody>
+      </p:sp>
+      <p:sp>
+        <p:nvSpPr>
+          <p:cNvPr id="3" name="TextBox 2"/>
+          <p:cNvSpPr txBox="1"/>
+          <p:nvPr/>
+        </p:nvSpPr>
+        <p:spPr>
+          <a:xfrm>
+            <a:off x="411480" y="731520"/>
+            <a:ext cx="11338560" cy="329184"/>
+          </a:xfrm>
+          <a:prstGeom prst="rect">
+            <a:avLst/>
+          </a:prstGeom>
+          <a:noFill/>
+        </p:spPr>
+        <p:txBody>
+          <a:bodyPr wrap="square" lIns="36576" rIns="36576" tIns="36576" bIns="36576" anchor="t">
+            <a:noAutofit/>
+          </a:bodyPr>
+          <a:lstStyle/>
+          <a:p>
+            <a:pPr algn="l">
+              <a:spcAft>
+                <a:spcPts val="0"/>
+              </a:spcAft>
             </a:pPr>
             <a:r>
-              <a:t>Multimodal Data Ingestion, Time-Series Fusion, AI Scoring &amp; Clinical Decision Pipeline</a:t>
-            </a:r>
-          </a:p>
-        </p:txBody>
-      </p:sp>
-      <p:sp>
-        <p:nvSpPr>
-          <p:cNvPr id="3" name="Rounded Rectangle 2"/>
+              <a:rPr sz="1400" b="0" i="0">
+                <a:solidFill>
+                  <a:srgbClr val="64748B"/>
+                </a:solidFill>
+                <a:latin typeface="Calibri"/>
+              </a:rPr>
+              <a:t>Boxes are files in the repository; arrows show data flow. White = script, tinted = data or model file, navy = clinician. Slide 2: care pathway.</a:t>
+            </a:r>
+          </a:p>
+        </p:txBody>
+      </p:sp>
+      <p:sp>
+        <p:nvSpPr>
+          <p:cNvPr id="4" name="Rounded Rectangle 3"/>
           <p:cNvSpPr/>
           <p:nvPr/>
         </p:nvSpPr>
         <p:spPr>
           <a:xfrm>
-            <a:off x="731520" y="1371600"/>
-            <a:ext cx="2514600" cy="4937760"/>
+            <a:off x="274320" y="1097280"/>
+            <a:ext cx="11640312" cy="2560320"/>
           </a:xfrm>
           <a:prstGeom prst="roundRect">
-            <a:avLst/>
+            <a:avLst>
+              <a:gd name="adj" fmla="val 3000"/>
+            </a:avLst>
           </a:prstGeom>
           <a:solidFill>
             <a:srgbClr val="F8FAFC"/>
           </a:solidFill>
-          <a:ln>
+          <a:ln w="12700">
             <a:solidFill>
-              <a:srgbClr val="E2E8F0"/>
+              <a:srgbClr val="CBD5E1"/>
             </a:solidFill>
           </a:ln>
-        </p:spPr>
-        <p:style>
-          <a:lnRef idx="1">
-            <a:schemeClr val="accent1"/>
-          </a:lnRef>
-          <a:fillRef idx="3">
-            <a:schemeClr val="accent1"/>
-          </a:fillRef>
-          <a:effectRef idx="2">
-            <a:schemeClr val="accent1"/>
-          </a:effectRef>
-          <a:fontRef idx="minor">
-            <a:schemeClr val="lt1"/>
-          </a:fontRef>
-        </p:style>
-        <p:txBody>
-          <a:bodyPr rtlCol="0" anchor="ctr"/>
+          <a:effectLst/>
+        </p:spPr>
+        <p:txBody>
+          <a:bodyPr rtlCol="0" anchor="t" wrap="square" lIns="128016" rIns="128016">
+            <a:noAutofit/>
+          </a:bodyPr>
           <a:lstStyle/>
           <a:p>
             <a:pPr algn="ctr"/>
@@ -3182,741 +3213,1595 @@
       </p:sp>
       <p:sp>
         <p:nvSpPr>
-          <p:cNvPr id="4" name="Rectangle 3"/>
+          <p:cNvPr id="5" name="TextBox 4"/>
+          <p:cNvSpPr txBox="1"/>
+          <p:nvPr/>
+        </p:nvSpPr>
+        <p:spPr>
+          <a:xfrm>
+            <a:off x="411480" y="1115568"/>
+            <a:ext cx="6400800" cy="274320"/>
+          </a:xfrm>
+          <a:prstGeom prst="rect">
+            <a:avLst/>
+          </a:prstGeom>
+          <a:noFill/>
+        </p:spPr>
+        <p:txBody>
+          <a:bodyPr wrap="square" lIns="36576" rIns="36576" tIns="36576" bIns="36576" anchor="t">
+            <a:noAutofit/>
+          </a:bodyPr>
+          <a:lstStyle/>
+          <a:p>
+            <a:pPr algn="l">
+              <a:spcAft>
+                <a:spcPts val="400"/>
+              </a:spcAft>
+            </a:pPr>
+            <a:r>
+              <a:rPr sz="1200" b="1" i="0">
+                <a:solidFill>
+                  <a:srgbClr val="0F766E"/>
+                </a:solidFill>
+                <a:latin typeface="Calibri"/>
+              </a:rPr>
+              <a:t>1  OFFLINE: SIMULATE, TRAIN, EVALUATE</a:t>
+            </a:r>
+          </a:p>
+        </p:txBody>
+      </p:sp>
+      <p:sp>
+        <p:nvSpPr>
+          <p:cNvPr id="6" name="Rounded Rectangle 5"/>
           <p:cNvSpPr/>
           <p:nvPr/>
         </p:nvSpPr>
         <p:spPr>
           <a:xfrm>
-            <a:off x="731520" y="1371600"/>
-            <a:ext cx="2514600" cy="91440"/>
+            <a:off x="274320" y="3931920"/>
+            <a:ext cx="11640312" cy="2560320"/>
+          </a:xfrm>
+          <a:prstGeom prst="roundRect">
+            <a:avLst>
+              <a:gd name="adj" fmla="val 3000"/>
+            </a:avLst>
+          </a:prstGeom>
+          <a:solidFill>
+            <a:srgbClr val="F8FAFC"/>
+          </a:solidFill>
+          <a:ln w="12700">
+            <a:solidFill>
+              <a:srgbClr val="CBD5E1"/>
+            </a:solidFill>
+          </a:ln>
+          <a:effectLst/>
+        </p:spPr>
+        <p:txBody>
+          <a:bodyPr rtlCol="0" anchor="t" wrap="square" lIns="128016" rIns="128016">
+            <a:noAutofit/>
+          </a:bodyPr>
+          <a:lstStyle/>
+          <a:p>
+            <a:pPr algn="ctr"/>
+          </a:p>
+        </p:txBody>
+      </p:sp>
+      <p:sp>
+        <p:nvSpPr>
+          <p:cNvPr id="7" name="TextBox 6"/>
+          <p:cNvSpPr txBox="1"/>
+          <p:nvPr/>
+        </p:nvSpPr>
+        <p:spPr>
+          <a:xfrm>
+            <a:off x="411480" y="3950208"/>
+            <a:ext cx="6400800" cy="274320"/>
           </a:xfrm>
           <a:prstGeom prst="rect">
             <a:avLst/>
           </a:prstGeom>
+          <a:noFill/>
+        </p:spPr>
+        <p:txBody>
+          <a:bodyPr wrap="square" lIns="36576" rIns="36576" tIns="36576" bIns="36576" anchor="t">
+            <a:noAutofit/>
+          </a:bodyPr>
+          <a:lstStyle/>
+          <a:p>
+            <a:pPr algn="l">
+              <a:spcAft>
+                <a:spcPts val="400"/>
+              </a:spcAft>
+            </a:pPr>
+            <a:r>
+              <a:rPr sz="1200" b="1" i="0">
+                <a:solidFill>
+                  <a:srgbClr val="0F766E"/>
+                </a:solidFill>
+                <a:latin typeface="Calibri"/>
+              </a:rPr>
+              <a:t>2  SERVING: TWO INFERENCE PATHS, DOCTOR IN THE LOOP</a:t>
+            </a:r>
+          </a:p>
+        </p:txBody>
+      </p:sp>
+      <p:sp>
+        <p:nvSpPr>
+          <p:cNvPr id="8" name="Rounded Rectangle 7"/>
+          <p:cNvSpPr/>
+          <p:nvPr/>
+        </p:nvSpPr>
+        <p:spPr>
+          <a:xfrm>
+            <a:off x="411480" y="1723643"/>
+            <a:ext cx="1600200" cy="1554480"/>
+          </a:xfrm>
+          <a:prstGeom prst="roundRect">
+            <a:avLst>
+              <a:gd name="adj" fmla="val 7000"/>
+            </a:avLst>
+          </a:prstGeom>
           <a:solidFill>
-            <a:srgbClr val="0D9488"/>
+            <a:srgbClr val="FFFFFF"/>
+          </a:solidFill>
+          <a:ln w="19050">
+            <a:solidFill>
+              <a:srgbClr val="0F766E"/>
+            </a:solidFill>
+          </a:ln>
+          <a:effectLst/>
+        </p:spPr>
+        <p:txBody>
+          <a:bodyPr rtlCol="0" anchor="ctr" wrap="square">
+            <a:noAutofit/>
+          </a:bodyPr>
+          <a:lstStyle/>
+          <a:p>
+            <a:pPr algn="l">
+              <a:lnSpc>
+                <a:spcPct val="95000"/>
+              </a:lnSpc>
+              <a:spcAft>
+                <a:spcPts val="300"/>
+              </a:spcAft>
+            </a:pPr>
+            <a:r>
+              <a:rPr sz="1400" b="1" i="0">
+                <a:solidFill>
+                  <a:srgbClr val="0F766E"/>
+                </a:solidFill>
+                <a:latin typeface="Calibri"/>
+              </a:rPr>
+              <a:t>generate_​datasets.py</a:t>
+            </a:r>
+          </a:p>
+          <a:p>
+            <a:pPr algn="l">
+              <a:lnSpc>
+                <a:spcPct val="95000"/>
+              </a:lnSpc>
+              <a:spcAft>
+                <a:spcPts val="100"/>
+              </a:spcAft>
+            </a:pPr>
+            <a:r>
+              <a:rPr sz="1400" b="0" i="0">
+                <a:solidFill>
+                  <a:srgbClr val="334155"/>
+                </a:solidFill>
+                <a:latin typeface="Calibri"/>
+              </a:rPr>
+              <a:t>data/ · seeded simulator, illustrative parameters</a:t>
+            </a:r>
+          </a:p>
+        </p:txBody>
+      </p:sp>
+      <p:sp>
+        <p:nvSpPr>
+          <p:cNvPr id="9" name="Rounded Rectangle 8"/>
+          <p:cNvSpPr/>
+          <p:nvPr/>
+        </p:nvSpPr>
+        <p:spPr>
+          <a:xfrm>
+            <a:off x="2340864" y="1417320"/>
+            <a:ext cx="2148840" cy="914399"/>
+          </a:xfrm>
+          <a:prstGeom prst="roundRect">
+            <a:avLst>
+              <a:gd name="adj" fmla="val 7000"/>
+            </a:avLst>
+          </a:prstGeom>
+          <a:solidFill>
+            <a:srgbClr val="E6F4F1"/>
           </a:solidFill>
           <a:ln>
             <a:noFill/>
           </a:ln>
-        </p:spPr>
-        <p:style>
-          <a:lnRef idx="1">
-            <a:schemeClr val="accent1"/>
-          </a:lnRef>
-          <a:fillRef idx="3">
-            <a:schemeClr val="accent1"/>
-          </a:fillRef>
-          <a:effectRef idx="2">
-            <a:schemeClr val="accent1"/>
-          </a:effectRef>
-          <a:fontRef idx="minor">
-            <a:schemeClr val="lt1"/>
-          </a:fontRef>
-        </p:style>
-        <p:txBody>
-          <a:bodyPr rtlCol="0" anchor="ctr"/>
-          <a:lstStyle/>
-          <a:p>
-            <a:pPr algn="ctr"/>
-          </a:p>
-        </p:txBody>
-      </p:sp>
-      <p:sp>
-        <p:nvSpPr>
-          <p:cNvPr id="5" name="TextBox 4"/>
-          <p:cNvSpPr txBox="1"/>
-          <p:nvPr/>
-        </p:nvSpPr>
-        <p:spPr>
-          <a:xfrm>
-            <a:off x="868680" y="1600200"/>
-            <a:ext cx="2240280" cy="4572000"/>
-          </a:xfrm>
-          <a:prstGeom prst="rect">
-            <a:avLst/>
-          </a:prstGeom>
-          <a:noFill/>
-        </p:spPr>
-        <p:txBody>
-          <a:bodyPr wrap="none">
-            <a:spAutoFit/>
+          <a:effectLst/>
+        </p:spPr>
+        <p:txBody>
+          <a:bodyPr rtlCol="0" anchor="ctr" wrap="square">
+            <a:noAutofit/>
           </a:bodyPr>
           <a:lstStyle/>
           <a:p>
-            <a:pPr>
-              <a:defRPr sz="1200" b="1">
+            <a:pPr algn="l">
+              <a:lnSpc>
+                <a:spcPct val="95000"/>
+              </a:lnSpc>
+              <a:spcAft>
+                <a:spcPts val="300"/>
+              </a:spcAft>
+            </a:pPr>
+            <a:r>
+              <a:rPr sz="1400" b="1" i="0">
                 <a:solidFill>
                   <a:srgbClr val="0F172A"/>
                 </a:solidFill>
-              </a:defRPr>
+                <a:latin typeface="Calibri"/>
+              </a:rPr>
+              <a:t>synthetic_​ehr.csv</a:t>
+            </a:r>
+          </a:p>
+          <a:p>
+            <a:pPr algn="l">
+              <a:lnSpc>
+                <a:spcPct val="95000"/>
+              </a:lnSpc>
+              <a:spcAft>
+                <a:spcPts val="100"/>
+              </a:spcAft>
             </a:pPr>
             <a:r>
-              <a:t>Layer 1: Multimodal Data Ingestion</a:t>
-            </a:r>
-          </a:p>
-          <a:p>
-            <a:pPr>
-              <a:spcAft>
-                <a:spcPts val="1000"/>
-              </a:spcAft>
-              <a:defRPr sz="900" b="1">
-                <a:solidFill>
-                  <a:srgbClr val="0D9488"/>
-                </a:solidFill>
-              </a:defRPr>
-            </a:pPr>
-            <a:r>
-              <a:t>STATIC CLINICAL EHR + DYNAMIC SENSOR IOT</a:t>
-            </a:r>
-          </a:p>
-          <a:p>
-            <a:pPr>
-              <a:spcAft>
-                <a:spcPts val="500"/>
-              </a:spcAft>
-              <a:defRPr sz="1000">
+              <a:rPr sz="1400" b="0" i="0">
                 <a:solidFill>
                   <a:srgbClr val="334155"/>
                 </a:solidFill>
-              </a:defRPr>
-            </a:pPr>
-            <a:r>
-              <a:t>• Static EHR: Demographics, Age, Gender, South-Asian BMI</a:t>
-            </a:r>
-          </a:p>
-          <a:p>
-            <a:pPr>
-              <a:spcAft>
-                <a:spcPts val="500"/>
-              </a:spcAft>
-              <a:defRPr sz="1000">
-                <a:solidFill>
-                  <a:srgbClr val="334155"/>
-                </a:solidFill>
-              </a:defRPr>
-            </a:pPr>
-            <a:r>
-              <a:t>• Baseline Biomarkers: HbA1c (5.7-12.5%), eGFR, Fasting Glucose</a:t>
-            </a:r>
-          </a:p>
-          <a:p>
-            <a:pPr>
-              <a:spcAft>
-                <a:spcPts val="500"/>
-              </a:spcAft>
-              <a:defRPr sz="1000">
-                <a:solidFill>
-                  <a:srgbClr val="334155"/>
-                </a:solidFill>
-              </a:defRPr>
-            </a:pPr>
-            <a:r>
-              <a:t>• Pharmacotherapy: Metformin, Sulfonylureas, SGLT2i, Insulin</a:t>
-            </a:r>
-          </a:p>
-          <a:p>
-            <a:pPr>
-              <a:spcAft>
-                <a:spcPts val="500"/>
-              </a:spcAft>
-              <a:defRPr sz="1000">
-                <a:solidFill>
-                  <a:srgbClr val="334155"/>
-                </a:solidFill>
-              </a:defRPr>
-            </a:pPr>
-            <a:r>
-              <a:t>• Dynamic CGM: Continuous Glucose (15-min Telemetry)</a:t>
-            </a:r>
-          </a:p>
-          <a:p>
-            <a:pPr>
-              <a:spcAft>
-                <a:spcPts val="500"/>
-              </a:spcAft>
-              <a:defRPr sz="1000">
-                <a:solidFill>
-                  <a:srgbClr val="334155"/>
-                </a:solidFill>
-              </a:defRPr>
-            </a:pPr>
-            <a:r>
-              <a:t>• Photoplethysmography: Heart Rate (BPM), HRV (ms)</a:t>
-            </a:r>
-          </a:p>
-          <a:p>
-            <a:pPr>
-              <a:spcAft>
-                <a:spcPts val="500"/>
-              </a:spcAft>
-              <a:defRPr sz="1000">
-                <a:solidFill>
-                  <a:srgbClr val="334155"/>
-                </a:solidFill>
-              </a:defRPr>
-            </a:pPr>
-            <a:r>
-              <a:t>• Inertial Sensors: 15-min Steps, Sleep Stage (Awake/Sleep)</a:t>
-            </a:r>
-          </a:p>
-        </p:txBody>
-      </p:sp>
-      <p:sp>
-        <p:nvSpPr>
-          <p:cNvPr id="6" name="Rounded Rectangle 5"/>
+                <a:latin typeface="Calibri"/>
+              </a:rPr>
+              <a:t>200 personas: labs, meds, history, TCF7L2</a:t>
+            </a:r>
+          </a:p>
+        </p:txBody>
+      </p:sp>
+      <p:sp>
+        <p:nvSpPr>
+          <p:cNvPr id="10" name="Rounded Rectangle 9"/>
           <p:cNvSpPr/>
           <p:nvPr/>
         </p:nvSpPr>
         <p:spPr>
           <a:xfrm>
-            <a:off x="3474720" y="1371600"/>
-            <a:ext cx="2514600" cy="4937760"/>
+            <a:off x="2340864" y="2670048"/>
+            <a:ext cx="2148840" cy="914400"/>
           </a:xfrm>
           <a:prstGeom prst="roundRect">
-            <a:avLst/>
+            <a:avLst>
+              <a:gd name="adj" fmla="val 7000"/>
+            </a:avLst>
           </a:prstGeom>
           <a:solidFill>
-            <a:srgbClr val="F8FAFC"/>
-          </a:solidFill>
-          <a:ln>
-            <a:solidFill>
-              <a:srgbClr val="E2E8F0"/>
-            </a:solidFill>
-          </a:ln>
-        </p:spPr>
-        <p:style>
-          <a:lnRef idx="1">
-            <a:schemeClr val="accent1"/>
-          </a:lnRef>
-          <a:fillRef idx="3">
-            <a:schemeClr val="accent1"/>
-          </a:fillRef>
-          <a:effectRef idx="2">
-            <a:schemeClr val="accent1"/>
-          </a:effectRef>
-          <a:fontRef idx="minor">
-            <a:schemeClr val="lt1"/>
-          </a:fontRef>
-        </p:style>
-        <p:txBody>
-          <a:bodyPr rtlCol="0" anchor="ctr"/>
-          <a:lstStyle/>
-          <a:p>
-            <a:pPr algn="ctr"/>
-          </a:p>
-        </p:txBody>
-      </p:sp>
-      <p:sp>
-        <p:nvSpPr>
-          <p:cNvPr id="7" name="Rectangle 6"/>
-          <p:cNvSpPr/>
-          <p:nvPr/>
-        </p:nvSpPr>
-        <p:spPr>
-          <a:xfrm>
-            <a:off x="3474720" y="1371600"/>
-            <a:ext cx="2514600" cy="91440"/>
-          </a:xfrm>
-          <a:prstGeom prst="rect">
-            <a:avLst/>
-          </a:prstGeom>
-          <a:solidFill>
-            <a:srgbClr val="0284C7"/>
+            <a:srgbClr val="E6F4F1"/>
           </a:solidFill>
           <a:ln>
             <a:noFill/>
           </a:ln>
-        </p:spPr>
-        <p:style>
-          <a:lnRef idx="1">
-            <a:schemeClr val="accent1"/>
-          </a:lnRef>
-          <a:fillRef idx="3">
-            <a:schemeClr val="accent1"/>
-          </a:fillRef>
-          <a:effectRef idx="2">
-            <a:schemeClr val="accent1"/>
-          </a:effectRef>
-          <a:fontRef idx="minor">
-            <a:schemeClr val="lt1"/>
-          </a:fontRef>
-        </p:style>
-        <p:txBody>
-          <a:bodyPr rtlCol="0" anchor="ctr"/>
-          <a:lstStyle/>
-          <a:p>
-            <a:pPr algn="ctr"/>
-          </a:p>
-        </p:txBody>
-      </p:sp>
-      <p:sp>
-        <p:nvSpPr>
-          <p:cNvPr id="8" name="TextBox 7"/>
-          <p:cNvSpPr txBox="1"/>
-          <p:nvPr/>
-        </p:nvSpPr>
-        <p:spPr>
-          <a:xfrm>
-            <a:off x="3611880" y="1600200"/>
-            <a:ext cx="2240280" cy="4572000"/>
-          </a:xfrm>
-          <a:prstGeom prst="rect">
-            <a:avLst/>
-          </a:prstGeom>
-          <a:noFill/>
-        </p:spPr>
-        <p:txBody>
-          <a:bodyPr wrap="none">
-            <a:spAutoFit/>
+          <a:effectLst/>
+        </p:spPr>
+        <p:txBody>
+          <a:bodyPr rtlCol="0" anchor="ctr" wrap="square">
+            <a:noAutofit/>
           </a:bodyPr>
           <a:lstStyle/>
           <a:p>
-            <a:pPr>
-              <a:defRPr sz="1200" b="1">
+            <a:pPr algn="l">
+              <a:lnSpc>
+                <a:spcPct val="95000"/>
+              </a:lnSpc>
+              <a:spcAft>
+                <a:spcPts val="300"/>
+              </a:spcAft>
+            </a:pPr>
+            <a:r>
+              <a:rPr sz="1400" b="1" i="0">
                 <a:solidFill>
                   <a:srgbClr val="0F172A"/>
                 </a:solidFill>
-              </a:defRPr>
+                <a:latin typeface="Calibri"/>
+              </a:rPr>
+              <a:t>synthetic_​wearables.csv</a:t>
+            </a:r>
+          </a:p>
+          <a:p>
+            <a:pPr algn="l">
+              <a:lnSpc>
+                <a:spcPct val="95000"/>
+              </a:lnSpc>
+              <a:spcAft>
+                <a:spcPts val="100"/>
+              </a:spcAft>
             </a:pPr>
             <a:r>
-              <a:t>Layer 2: Time-Series Feature Fusion</a:t>
-            </a:r>
-          </a:p>
-          <a:p>
-            <a:pPr>
-              <a:spcAft>
-                <a:spcPts val="1000"/>
-              </a:spcAft>
-              <a:defRPr sz="900" b="1">
-                <a:solidFill>
-                  <a:srgbClr val="0284C7"/>
-                </a:solidFill>
-              </a:defRPr>
-            </a:pPr>
-            <a:r>
-              <a:t>MATHEMATICAL FEATURE ENGINEERING</a:t>
-            </a:r>
-          </a:p>
-          <a:p>
-            <a:pPr>
-              <a:spcAft>
-                <a:spcPts val="500"/>
-              </a:spcAft>
-              <a:defRPr sz="1000">
+              <a:rPr sz="1400" b="0" i="0">
                 <a:solidFill>
                   <a:srgbClr val="334155"/>
                 </a:solidFill>
-              </a:defRPr>
-            </a:pPr>
-            <a:r>
-              <a:t>• Rolling Derivatives: Glucose Velocity dG/dt (15m, 30m)</a:t>
-            </a:r>
-          </a:p>
-          <a:p>
-            <a:pPr>
-              <a:spcAft>
-                <a:spcPts val="500"/>
-              </a:spcAft>
-              <a:defRPr sz="1000">
-                <a:solidFill>
-                  <a:srgbClr val="334155"/>
-                </a:solidFill>
-              </a:defRPr>
-            </a:pPr>
-            <a:r>
-              <a:t>• Glycemic Volatility: 1-hour Rolling Standard Deviation</a:t>
-            </a:r>
-          </a:p>
-          <a:p>
-            <a:pPr>
-              <a:spcAft>
-                <a:spcPts val="500"/>
-              </a:spcAft>
-              <a:defRPr sz="1000">
-                <a:solidFill>
-                  <a:srgbClr val="334155"/>
-                </a:solidFill>
-              </a:defRPr>
-            </a:pPr>
-            <a:r>
-              <a:t>• Exertion Accumulator: 1h &amp; 2h Step Integration</a:t>
-            </a:r>
-          </a:p>
-          <a:p>
-            <a:pPr>
-              <a:spcAft>
-                <a:spcPts val="500"/>
-              </a:spcAft>
-              <a:defRPr sz="1000">
-                <a:solidFill>
-                  <a:srgbClr val="334155"/>
-                </a:solidFill>
-              </a:defRPr>
-            </a:pPr>
-            <a:r>
-              <a:t>• Nutritional Absorption: 2h Carbohydrate Load (g)</a:t>
-            </a:r>
-          </a:p>
-          <a:p>
-            <a:pPr>
-              <a:spcAft>
-                <a:spcPts val="500"/>
-              </a:spcAft>
-              <a:defRPr sz="1000">
-                <a:solidFill>
-                  <a:srgbClr val="334155"/>
-                </a:solidFill>
-              </a:defRPr>
-            </a:pPr>
-            <a:r>
-              <a:t>• Pharmacodynamics: 2h Bolus Insulin Integration (U)</a:t>
-            </a:r>
-          </a:p>
-          <a:p>
-            <a:pPr>
-              <a:spcAft>
-                <a:spcPts val="500"/>
-              </a:spcAft>
-              <a:defRPr sz="1000">
-                <a:solidFill>
-                  <a:srgbClr val="334155"/>
-                </a:solidFill>
-              </a:defRPr>
-            </a:pPr>
-            <a:r>
-              <a:t>• Synchronous Fusion Engine: Aligned on Patient ID &amp; Window</a:t>
-            </a:r>
-          </a:p>
-        </p:txBody>
-      </p:sp>
-      <p:sp>
-        <p:nvSpPr>
-          <p:cNvPr id="9" name="Rounded Rectangle 8"/>
+                <a:latin typeface="Calibri"/>
+              </a:rPr>
+              <a:t>132,800 windows of 15 min</a:t>
+            </a:r>
+          </a:p>
+        </p:txBody>
+      </p:sp>
+      <p:sp>
+        <p:nvSpPr>
+          <p:cNvPr id="11" name="Rounded Rectangle 10"/>
           <p:cNvSpPr/>
           <p:nvPr/>
         </p:nvSpPr>
         <p:spPr>
           <a:xfrm>
-            <a:off x="6217920" y="1371600"/>
-            <a:ext cx="2514600" cy="4937760"/>
+            <a:off x="4818888" y="1417320"/>
+            <a:ext cx="2697480" cy="2167128"/>
           </a:xfrm>
           <a:prstGeom prst="roundRect">
-            <a:avLst/>
+            <a:avLst>
+              <a:gd name="adj" fmla="val 7000"/>
+            </a:avLst>
           </a:prstGeom>
           <a:solidFill>
-            <a:srgbClr val="F8FAFC"/>
+            <a:srgbClr val="FFFFFF"/>
           </a:solidFill>
-          <a:ln>
+          <a:ln w="19050">
             <a:solidFill>
-              <a:srgbClr val="E2E8F0"/>
+              <a:srgbClr val="0F766E"/>
             </a:solidFill>
           </a:ln>
-        </p:spPr>
-        <p:style>
-          <a:lnRef idx="1">
-            <a:schemeClr val="accent1"/>
-          </a:lnRef>
-          <a:fillRef idx="3">
-            <a:schemeClr val="accent1"/>
-          </a:fillRef>
-          <a:effectRef idx="2">
-            <a:schemeClr val="accent1"/>
-          </a:effectRef>
-          <a:fontRef idx="minor">
-            <a:schemeClr val="lt1"/>
-          </a:fontRef>
-        </p:style>
-        <p:txBody>
-          <a:bodyPr rtlCol="0" anchor="ctr"/>
-          <a:lstStyle/>
-          <a:p>
-            <a:pPr algn="ctr"/>
-          </a:p>
-        </p:txBody>
-      </p:sp>
-      <p:sp>
-        <p:nvSpPr>
-          <p:cNvPr id="10" name="Rectangle 9"/>
+          <a:effectLst/>
+        </p:spPr>
+        <p:txBody>
+          <a:bodyPr rtlCol="0" anchor="ctr" wrap="square">
+            <a:noAutofit/>
+          </a:bodyPr>
+          <a:lstStyle/>
+          <a:p>
+            <a:pPr algn="l">
+              <a:lnSpc>
+                <a:spcPct val="95000"/>
+              </a:lnSpc>
+              <a:spcAft>
+                <a:spcPts val="300"/>
+              </a:spcAft>
+            </a:pPr>
+            <a:r>
+              <a:rPr sz="1400" b="1" i="0">
+                <a:solidFill>
+                  <a:srgbClr val="0F766E"/>
+                </a:solidFill>
+                <a:latin typeface="Calibri"/>
+              </a:rPr>
+              <a:t>train_​fusion_​model.py</a:t>
+            </a:r>
+          </a:p>
+          <a:p>
+            <a:pPr algn="l" marL="146304" indent="-146304">
+              <a:lnSpc>
+                <a:spcPct val="95000"/>
+              </a:lnSpc>
+              <a:spcAft>
+                <a:spcPts val="200"/>
+              </a:spcAft>
+              <a:buClr>
+                <a:srgbClr val="0F766E"/>
+              </a:buClr>
+              <a:buFont typeface="Arial"/>
+              <a:buChar char="•"/>
+            </a:pPr>
+            <a:r>
+              <a:rPr sz="1400" b="0" i="0">
+                <a:solidFill>
+                  <a:srgbClr val="334155"/>
+                </a:solidFill>
+                <a:latin typeface="Calibri"/>
+              </a:rPr>
+              <a:t>34 features: 18 wearable + 16 EHR, EHR joined to every window</a:t>
+            </a:r>
+          </a:p>
+          <a:p>
+            <a:pPr algn="l" marL="146304" indent="-146304">
+              <a:lnSpc>
+                <a:spcPct val="95000"/>
+              </a:lnSpc>
+              <a:spcAft>
+                <a:spcPts val="200"/>
+              </a:spcAft>
+              <a:buClr>
+                <a:srgbClr val="0F766E"/>
+              </a:buClr>
+              <a:buFont typeface="Arial"/>
+              <a:buChar char="•"/>
+            </a:pPr>
+            <a:r>
+              <a:rPr sz="1400" b="0" i="0">
+                <a:solidFill>
+                  <a:srgbClr val="334155"/>
+                </a:solidFill>
+                <a:latin typeface="Calibri"/>
+              </a:rPr>
+              <a:t>patient split 150 / 50</a:t>
+            </a:r>
+          </a:p>
+          <a:p>
+            <a:pPr algn="l" marL="146304" indent="-146304">
+              <a:lnSpc>
+                <a:spcPct val="95000"/>
+              </a:lnSpc>
+              <a:spcAft>
+                <a:spcPts val="200"/>
+              </a:spcAft>
+              <a:buClr>
+                <a:srgbClr val="0F766E"/>
+              </a:buClr>
+              <a:buFont typeface="Arial"/>
+              <a:buChar char="•"/>
+            </a:pPr>
+            <a:r>
+              <a:rPr sz="1400" b="0" i="0">
+                <a:solidFill>
+                  <a:srgbClr val="334155"/>
+                </a:solidFill>
+                <a:latin typeface="Calibri"/>
+              </a:rPr>
+              <a:t>HGB classifier + regressor</a:t>
+            </a:r>
+          </a:p>
+          <a:p>
+            <a:pPr algn="l" marL="146304" indent="-146304">
+              <a:lnSpc>
+                <a:spcPct val="95000"/>
+              </a:lnSpc>
+              <a:spcAft>
+                <a:spcPts val="200"/>
+              </a:spcAft>
+              <a:buClr>
+                <a:srgbClr val="0F766E"/>
+              </a:buClr>
+              <a:buFont typeface="Arial"/>
+              <a:buChar char="•"/>
+            </a:pPr>
+            <a:r>
+              <a:rPr sz="1400" b="0" i="0">
+                <a:solidFill>
+                  <a:srgbClr val="334155"/>
+                </a:solidFill>
+                <a:latin typeface="Calibri"/>
+              </a:rPr>
+              <a:t>alert thresholds 0.51 / 0.52 by F2 on grouped CV of training patients</a:t>
+            </a:r>
+          </a:p>
+        </p:txBody>
+      </p:sp>
+      <p:sp>
+        <p:nvSpPr>
+          <p:cNvPr id="12" name="Rounded Rectangle 11"/>
           <p:cNvSpPr/>
           <p:nvPr/>
         </p:nvSpPr>
         <p:spPr>
           <a:xfrm>
-            <a:off x="6217920" y="1371600"/>
-            <a:ext cx="2514600" cy="91440"/>
-          </a:xfrm>
-          <a:prstGeom prst="rect">
-            <a:avLst/>
+            <a:off x="7845552" y="1417320"/>
+            <a:ext cx="1783080" cy="2167128"/>
+          </a:xfrm>
+          <a:prstGeom prst="roundRect">
+            <a:avLst>
+              <a:gd name="adj" fmla="val 7000"/>
+            </a:avLst>
           </a:prstGeom>
           <a:solidFill>
-            <a:srgbClr val="8B5CF6"/>
+            <a:srgbClr val="E6F4F1"/>
           </a:solidFill>
           <a:ln>
             <a:noFill/>
           </a:ln>
-        </p:spPr>
-        <p:style>
-          <a:lnRef idx="1">
-            <a:schemeClr val="accent1"/>
-          </a:lnRef>
-          <a:fillRef idx="3">
-            <a:schemeClr val="accent1"/>
-          </a:fillRef>
-          <a:effectRef idx="2">
-            <a:schemeClr val="accent1"/>
-          </a:effectRef>
-          <a:fontRef idx="minor">
-            <a:schemeClr val="lt1"/>
-          </a:fontRef>
-        </p:style>
-        <p:txBody>
-          <a:bodyPr rtlCol="0" anchor="ctr"/>
-          <a:lstStyle/>
-          <a:p>
-            <a:pPr algn="ctr"/>
-          </a:p>
-        </p:txBody>
-      </p:sp>
-      <p:sp>
-        <p:nvSpPr>
-          <p:cNvPr id="11" name="TextBox 10"/>
-          <p:cNvSpPr txBox="1"/>
-          <p:nvPr/>
-        </p:nvSpPr>
-        <p:spPr>
-          <a:xfrm>
-            <a:off x="6355080" y="1600200"/>
-            <a:ext cx="2240280" cy="4572000"/>
-          </a:xfrm>
-          <a:prstGeom prst="rect">
-            <a:avLst/>
-          </a:prstGeom>
-          <a:noFill/>
-        </p:spPr>
-        <p:txBody>
-          <a:bodyPr wrap="none">
-            <a:spAutoFit/>
+          <a:effectLst/>
+        </p:spPr>
+        <p:txBody>
+          <a:bodyPr rtlCol="0" anchor="ctr" wrap="square">
+            <a:noAutofit/>
           </a:bodyPr>
           <a:lstStyle/>
           <a:p>
-            <a:pPr>
-              <a:defRPr sz="1200" b="1">
+            <a:pPr algn="l">
+              <a:lnSpc>
+                <a:spcPct val="95000"/>
+              </a:lnSpc>
+              <a:spcAft>
+                <a:spcPts val="300"/>
+              </a:spcAft>
+            </a:pPr>
+            <a:r>
+              <a:rPr sz="1400" b="1" i="0">
                 <a:solidFill>
                   <a:srgbClr val="0F172A"/>
                 </a:solidFill>
-              </a:defRPr>
+                <a:latin typeface="Calibri"/>
+              </a:rPr>
+              <a:t>glycotwin_​model.joblib</a:t>
+            </a:r>
+          </a:p>
+          <a:p>
+            <a:pPr algn="l">
+              <a:lnSpc>
+                <a:spcPct val="95000"/>
+              </a:lnSpc>
+              <a:spcAft>
+                <a:spcPts val="100"/>
+              </a:spcAft>
             </a:pPr>
             <a:r>
-              <a:t>Layer 3: Predictive AI Core</a:t>
-            </a:r>
-          </a:p>
-          <a:p>
-            <a:pPr>
-              <a:spcAft>
-                <a:spcPts val="1000"/>
-              </a:spcAft>
-              <a:defRPr sz="900" b="1">
-                <a:solidFill>
-                  <a:srgbClr val="8B5CF6"/>
-                </a:solidFill>
-              </a:defRPr>
-            </a:pPr>
-            <a:r>
-              <a:t>SCIKIT-LEARN HISTGRADIENTBOOSTING</a:t>
-            </a:r>
-          </a:p>
-          <a:p>
-            <a:pPr>
-              <a:spcAft>
-                <a:spcPts val="500"/>
-              </a:spcAft>
-              <a:defRPr sz="1000">
+              <a:rPr sz="1400" b="0" i="0">
                 <a:solidFill>
                   <a:srgbClr val="334155"/>
                 </a:solidFill>
-              </a:defRPr>
-            </a:pPr>
-            <a:r>
-              <a:t>• Adverse Event Classifier: 2h Impending Hypo/Hyper Risk</a:t>
-            </a:r>
-          </a:p>
-          <a:p>
-            <a:pPr>
-              <a:spcAft>
-                <a:spcPts val="500"/>
-              </a:spcAft>
-              <a:defRPr sz="1000">
-                <a:solidFill>
-                  <a:srgbClr val="334155"/>
-                </a:solidFill>
-              </a:defRPr>
-            </a:pPr>
-            <a:r>
-              <a:t>• Trajectory Regressor: Exact Projected Glucose (mg/dL)</a:t>
-            </a:r>
-          </a:p>
-          <a:p>
-            <a:pPr>
-              <a:spcAft>
-                <a:spcPts val="500"/>
-              </a:spcAft>
-              <a:defRPr sz="1000">
-                <a:solidFill>
-                  <a:srgbClr val="334155"/>
-                </a:solidFill>
-              </a:defRPr>
-            </a:pPr>
-            <a:r>
-              <a:t>• Cost-Sensitive Weighting: Zero Missed Hypoglycemia Nadirs</a:t>
-            </a:r>
-          </a:p>
-          <a:p>
-            <a:pPr>
-              <a:spcAft>
-                <a:spcPts val="500"/>
-              </a:spcAft>
-              <a:defRPr sz="1000">
-                <a:solidFill>
-                  <a:srgbClr val="334155"/>
-                </a:solidFill>
-              </a:defRPr>
-            </a:pPr>
-            <a:r>
-              <a:t>• Native Missing-Value Routing: Zero Imputation Bias</a:t>
-            </a:r>
-          </a:p>
-          <a:p>
-            <a:pPr>
-              <a:spcAft>
-                <a:spcPts val="500"/>
-              </a:spcAft>
-              <a:defRPr sz="1000">
-                <a:solidFill>
-                  <a:srgbClr val="334155"/>
-                </a:solidFill>
-              </a:defRPr>
-            </a:pPr>
-            <a:r>
-              <a:t>• Model Calibration: Predicts True Probabilities (%)</a:t>
-            </a:r>
-          </a:p>
-          <a:p>
-            <a:pPr>
-              <a:spcAft>
-                <a:spcPts val="500"/>
-              </a:spcAft>
-              <a:defRPr sz="1000">
-                <a:solidFill>
-                  <a:srgbClr val="334155"/>
-                </a:solidFill>
-              </a:defRPr>
-            </a:pPr>
-            <a:r>
-              <a:t>• Sub-5ms Inference: Client-side Edge Execution</a:t>
-            </a:r>
-          </a:p>
-        </p:txBody>
-      </p:sp>
-      <p:sp>
-        <p:nvSpPr>
-          <p:cNvPr id="12" name="Rounded Rectangle 11"/>
+                <a:latin typeface="Calibri"/>
+              </a:rPr>
+              <a:t>classifier, regressor, thresholds, feature list, category levels, split</a:t>
+            </a:r>
+          </a:p>
+        </p:txBody>
+      </p:sp>
+      <p:sp>
+        <p:nvSpPr>
+          <p:cNvPr id="13" name="Rounded Rectangle 12"/>
           <p:cNvSpPr/>
           <p:nvPr/>
         </p:nvSpPr>
         <p:spPr>
           <a:xfrm>
-            <a:off x="8961120" y="1371600"/>
-            <a:ext cx="2514600" cy="4937760"/>
+            <a:off x="9957815" y="1417320"/>
+            <a:ext cx="1819656" cy="960120"/>
           </a:xfrm>
           <a:prstGeom prst="roundRect">
-            <a:avLst/>
+            <a:avLst>
+              <a:gd name="adj" fmla="val 7000"/>
+            </a:avLst>
           </a:prstGeom>
           <a:solidFill>
-            <a:srgbClr val="F8FAFC"/>
+            <a:srgbClr val="FFFFFF"/>
           </a:solidFill>
-          <a:ln>
+          <a:ln w="19050">
             <a:solidFill>
-              <a:srgbClr val="E2E8F0"/>
+              <a:srgbClr val="0F766E"/>
             </a:solidFill>
           </a:ln>
-        </p:spPr>
-        <p:style>
-          <a:lnRef idx="1">
-            <a:schemeClr val="accent1"/>
-          </a:lnRef>
-          <a:fillRef idx="3">
-            <a:schemeClr val="accent1"/>
-          </a:fillRef>
-          <a:effectRef idx="2">
-            <a:schemeClr val="accent1"/>
-          </a:effectRef>
-          <a:fontRef idx="minor">
-            <a:schemeClr val="lt1"/>
-          </a:fontRef>
-        </p:style>
-        <p:txBody>
-          <a:bodyPr rtlCol="0" anchor="ctr"/>
-          <a:lstStyle/>
-          <a:p>
-            <a:pPr algn="ctr"/>
-          </a:p>
-        </p:txBody>
-      </p:sp>
-      <p:sp>
-        <p:nvSpPr>
-          <p:cNvPr id="13" name="Rectangle 12"/>
+          <a:effectLst/>
+        </p:spPr>
+        <p:txBody>
+          <a:bodyPr rtlCol="0" anchor="ctr" wrap="square">
+            <a:noAutofit/>
+          </a:bodyPr>
+          <a:lstStyle/>
+          <a:p>
+            <a:pPr algn="l">
+              <a:lnSpc>
+                <a:spcPct val="95000"/>
+              </a:lnSpc>
+              <a:spcAft>
+                <a:spcPts val="300"/>
+              </a:spcAft>
+            </a:pPr>
+            <a:r>
+              <a:rPr sz="1400" b="1" i="0">
+                <a:solidFill>
+                  <a:srgbClr val="0F766E"/>
+                </a:solidFill>
+                <a:latin typeface="Calibri"/>
+              </a:rPr>
+              <a:t>evaluate.py</a:t>
+            </a:r>
+          </a:p>
+          <a:p>
+            <a:pPr algn="l">
+              <a:lnSpc>
+                <a:spcPct val="95000"/>
+              </a:lnSpc>
+              <a:spcAft>
+                <a:spcPts val="100"/>
+              </a:spcAft>
+            </a:pPr>
+            <a:r>
+              <a:rPr sz="1400" b="0" i="0">
+                <a:solidFill>
+                  <a:srgbClr val="334155"/>
+                </a:solidFill>
+                <a:latin typeface="Calibri"/>
+              </a:rPr>
+              <a:t>held-out, CV, baselines, ablation, latency</a:t>
+            </a:r>
+          </a:p>
+        </p:txBody>
+      </p:sp>
+      <p:sp>
+        <p:nvSpPr>
+          <p:cNvPr id="14" name="Rounded Rectangle 13"/>
           <p:cNvSpPr/>
           <p:nvPr/>
         </p:nvSpPr>
         <p:spPr>
           <a:xfrm>
-            <a:off x="8961120" y="1371600"/>
-            <a:ext cx="2514600" cy="91440"/>
-          </a:xfrm>
-          <a:prstGeom prst="rect">
-            <a:avLst/>
+            <a:off x="9957815" y="2670048"/>
+            <a:ext cx="1819656" cy="914400"/>
+          </a:xfrm>
+          <a:prstGeom prst="roundRect">
+            <a:avLst>
+              <a:gd name="adj" fmla="val 7000"/>
+            </a:avLst>
           </a:prstGeom>
           <a:solidFill>
-            <a:srgbClr val="10B981"/>
+            <a:srgbClr val="E6F4F1"/>
           </a:solidFill>
           <a:ln>
             <a:noFill/>
           </a:ln>
+          <a:effectLst/>
+        </p:spPr>
+        <p:txBody>
+          <a:bodyPr rtlCol="0" anchor="ctr" wrap="square">
+            <a:noAutofit/>
+          </a:bodyPr>
+          <a:lstStyle/>
+          <a:p>
+            <a:pPr algn="l">
+              <a:lnSpc>
+                <a:spcPct val="95000"/>
+              </a:lnSpc>
+              <a:spcAft>
+                <a:spcPts val="300"/>
+              </a:spcAft>
+            </a:pPr>
+            <a:r>
+              <a:rPr sz="1400" b="1" i="0">
+                <a:solidFill>
+                  <a:srgbClr val="0F172A"/>
+                </a:solidFill>
+                <a:latin typeface="Calibri"/>
+              </a:rPr>
+              <a:t>metrics.json</a:t>
+            </a:r>
+          </a:p>
+          <a:p>
+            <a:pPr algn="l">
+              <a:lnSpc>
+                <a:spcPct val="95000"/>
+              </a:lnSpc>
+              <a:spcAft>
+                <a:spcPts val="100"/>
+              </a:spcAft>
+            </a:pPr>
+            <a:r>
+              <a:rPr sz="1400" b="0" i="0">
+                <a:solidFill>
+                  <a:srgbClr val="334155"/>
+                </a:solidFill>
+                <a:latin typeface="Calibri"/>
+              </a:rPr>
+              <a:t>the only source of performance numbers</a:t>
+            </a:r>
+          </a:p>
+        </p:txBody>
+      </p:sp>
+      <p:cxnSp>
+        <p:nvCxnSpPr>
+          <p:cNvPr id="15" name="Connector 14"/>
+          <p:cNvCxnSpPr/>
+          <p:nvPr/>
+        </p:nvCxnSpPr>
+        <p:spPr>
+          <a:xfrm>
+            <a:off x="2011680" y="2500884"/>
+            <a:ext cx="164592" cy="0"/>
+          </a:xfrm>
+          <a:prstGeom prst="line">
+            <a:avLst/>
+          </a:prstGeom>
+          <a:ln w="22225">
+            <a:solidFill>
+              <a:srgbClr val="64748B"/>
+            </a:solidFill>
+          </a:ln>
         </p:spPr>
         <p:style>
-          <a:lnRef idx="1">
+          <a:lnRef idx="2">
             <a:schemeClr val="accent1"/>
           </a:lnRef>
-          <a:fillRef idx="3">
+          <a:fillRef idx="0">
             <a:schemeClr val="accent1"/>
           </a:fillRef>
-          <a:effectRef idx="2">
+          <a:effectRef idx="1">
             <a:schemeClr val="accent1"/>
           </a:effectRef>
           <a:fontRef idx="minor">
-            <a:schemeClr val="lt1"/>
+            <a:schemeClr val="tx1"/>
           </a:fontRef>
         </p:style>
-        <p:txBody>
-          <a:bodyPr rtlCol="0" anchor="ctr"/>
-          <a:lstStyle/>
-          <a:p>
-            <a:pPr algn="ctr"/>
-          </a:p>
-        </p:txBody>
-      </p:sp>
-      <p:sp>
-        <p:nvSpPr>
-          <p:cNvPr id="14" name="TextBox 13"/>
+      </p:cxnSp>
+      <p:cxnSp>
+        <p:nvCxnSpPr>
+          <p:cNvPr id="16" name="Connector 15"/>
+          <p:cNvCxnSpPr/>
+          <p:nvPr/>
+        </p:nvCxnSpPr>
+        <p:spPr>
+          <a:xfrm>
+            <a:off x="2176272" y="1874519"/>
+            <a:ext cx="0" cy="1252729"/>
+          </a:xfrm>
+          <a:prstGeom prst="line">
+            <a:avLst/>
+          </a:prstGeom>
+          <a:ln w="22225">
+            <a:solidFill>
+              <a:srgbClr val="64748B"/>
+            </a:solidFill>
+          </a:ln>
+        </p:spPr>
+        <p:style>
+          <a:lnRef idx="2">
+            <a:schemeClr val="accent1"/>
+          </a:lnRef>
+          <a:fillRef idx="0">
+            <a:schemeClr val="accent1"/>
+          </a:fillRef>
+          <a:effectRef idx="1">
+            <a:schemeClr val="accent1"/>
+          </a:effectRef>
+          <a:fontRef idx="minor">
+            <a:schemeClr val="tx1"/>
+          </a:fontRef>
+        </p:style>
+      </p:cxnSp>
+      <p:cxnSp>
+        <p:nvCxnSpPr>
+          <p:cNvPr id="17" name="Connector 16"/>
+          <p:cNvCxnSpPr/>
+          <p:nvPr/>
+        </p:nvCxnSpPr>
+        <p:spPr>
+          <a:xfrm>
+            <a:off x="2176272" y="1874519"/>
+            <a:ext cx="164592" cy="0"/>
+          </a:xfrm>
+          <a:prstGeom prst="line">
+            <a:avLst/>
+          </a:prstGeom>
+          <a:ln w="22225">
+            <a:solidFill>
+              <a:srgbClr val="64748B"/>
+            </a:solidFill>
+            <a:tailEnd type="triangle" w="med" len="med"/>
+          </a:ln>
+        </p:spPr>
+        <p:style>
+          <a:lnRef idx="2">
+            <a:schemeClr val="accent1"/>
+          </a:lnRef>
+          <a:fillRef idx="0">
+            <a:schemeClr val="accent1"/>
+          </a:fillRef>
+          <a:effectRef idx="1">
+            <a:schemeClr val="accent1"/>
+          </a:effectRef>
+          <a:fontRef idx="minor">
+            <a:schemeClr val="tx1"/>
+          </a:fontRef>
+        </p:style>
+      </p:cxnSp>
+      <p:cxnSp>
+        <p:nvCxnSpPr>
+          <p:cNvPr id="18" name="Connector 17"/>
+          <p:cNvCxnSpPr/>
+          <p:nvPr/>
+        </p:nvCxnSpPr>
+        <p:spPr>
+          <a:xfrm>
+            <a:off x="2176272" y="3127248"/>
+            <a:ext cx="164592" cy="0"/>
+          </a:xfrm>
+          <a:prstGeom prst="line">
+            <a:avLst/>
+          </a:prstGeom>
+          <a:ln w="22225">
+            <a:solidFill>
+              <a:srgbClr val="64748B"/>
+            </a:solidFill>
+            <a:tailEnd type="triangle" w="med" len="med"/>
+          </a:ln>
+        </p:spPr>
+        <p:style>
+          <a:lnRef idx="2">
+            <a:schemeClr val="accent1"/>
+          </a:lnRef>
+          <a:fillRef idx="0">
+            <a:schemeClr val="accent1"/>
+          </a:fillRef>
+          <a:effectRef idx="1">
+            <a:schemeClr val="accent1"/>
+          </a:effectRef>
+          <a:fontRef idx="minor">
+            <a:schemeClr val="tx1"/>
+          </a:fontRef>
+        </p:style>
+      </p:cxnSp>
+      <p:cxnSp>
+        <p:nvCxnSpPr>
+          <p:cNvPr id="19" name="Connector 18"/>
+          <p:cNvCxnSpPr/>
+          <p:nvPr/>
+        </p:nvCxnSpPr>
+        <p:spPr>
+          <a:xfrm>
+            <a:off x="4489704" y="1874519"/>
+            <a:ext cx="329184" cy="0"/>
+          </a:xfrm>
+          <a:prstGeom prst="line">
+            <a:avLst/>
+          </a:prstGeom>
+          <a:ln w="22225">
+            <a:solidFill>
+              <a:srgbClr val="64748B"/>
+            </a:solidFill>
+            <a:tailEnd type="triangle" w="med" len="med"/>
+          </a:ln>
+        </p:spPr>
+        <p:style>
+          <a:lnRef idx="2">
+            <a:schemeClr val="accent1"/>
+          </a:lnRef>
+          <a:fillRef idx="0">
+            <a:schemeClr val="accent1"/>
+          </a:fillRef>
+          <a:effectRef idx="1">
+            <a:schemeClr val="accent1"/>
+          </a:effectRef>
+          <a:fontRef idx="minor">
+            <a:schemeClr val="tx1"/>
+          </a:fontRef>
+        </p:style>
+      </p:cxnSp>
+      <p:cxnSp>
+        <p:nvCxnSpPr>
+          <p:cNvPr id="20" name="Connector 19"/>
+          <p:cNvCxnSpPr/>
+          <p:nvPr/>
+        </p:nvCxnSpPr>
+        <p:spPr>
+          <a:xfrm>
+            <a:off x="4489704" y="3127248"/>
+            <a:ext cx="329184" cy="0"/>
+          </a:xfrm>
+          <a:prstGeom prst="line">
+            <a:avLst/>
+          </a:prstGeom>
+          <a:ln w="22225">
+            <a:solidFill>
+              <a:srgbClr val="64748B"/>
+            </a:solidFill>
+            <a:tailEnd type="triangle" w="med" len="med"/>
+          </a:ln>
+        </p:spPr>
+        <p:style>
+          <a:lnRef idx="2">
+            <a:schemeClr val="accent1"/>
+          </a:lnRef>
+          <a:fillRef idx="0">
+            <a:schemeClr val="accent1"/>
+          </a:fillRef>
+          <a:effectRef idx="1">
+            <a:schemeClr val="accent1"/>
+          </a:effectRef>
+          <a:fontRef idx="minor">
+            <a:schemeClr val="tx1"/>
+          </a:fontRef>
+        </p:style>
+      </p:cxnSp>
+      <p:cxnSp>
+        <p:nvCxnSpPr>
+          <p:cNvPr id="21" name="Connector 20"/>
+          <p:cNvCxnSpPr/>
+          <p:nvPr/>
+        </p:nvCxnSpPr>
+        <p:spPr>
+          <a:xfrm>
+            <a:off x="7516368" y="2500884"/>
+            <a:ext cx="329184" cy="0"/>
+          </a:xfrm>
+          <a:prstGeom prst="line">
+            <a:avLst/>
+          </a:prstGeom>
+          <a:ln w="22225">
+            <a:solidFill>
+              <a:srgbClr val="64748B"/>
+            </a:solidFill>
+            <a:tailEnd type="triangle" w="med" len="med"/>
+          </a:ln>
+        </p:spPr>
+        <p:style>
+          <a:lnRef idx="2">
+            <a:schemeClr val="accent1"/>
+          </a:lnRef>
+          <a:fillRef idx="0">
+            <a:schemeClr val="accent1"/>
+          </a:fillRef>
+          <a:effectRef idx="1">
+            <a:schemeClr val="accent1"/>
+          </a:effectRef>
+          <a:fontRef idx="minor">
+            <a:schemeClr val="tx1"/>
+          </a:fontRef>
+        </p:style>
+      </p:cxnSp>
+      <p:cxnSp>
+        <p:nvCxnSpPr>
+          <p:cNvPr id="22" name="Connector 21"/>
+          <p:cNvCxnSpPr/>
+          <p:nvPr/>
+        </p:nvCxnSpPr>
+        <p:spPr>
+          <a:xfrm>
+            <a:off x="9628632" y="1897380"/>
+            <a:ext cx="329183" cy="0"/>
+          </a:xfrm>
+          <a:prstGeom prst="line">
+            <a:avLst/>
+          </a:prstGeom>
+          <a:ln w="22225">
+            <a:solidFill>
+              <a:srgbClr val="64748B"/>
+            </a:solidFill>
+            <a:tailEnd type="triangle" w="med" len="med"/>
+          </a:ln>
+        </p:spPr>
+        <p:style>
+          <a:lnRef idx="2">
+            <a:schemeClr val="accent1"/>
+          </a:lnRef>
+          <a:fillRef idx="0">
+            <a:schemeClr val="accent1"/>
+          </a:fillRef>
+          <a:effectRef idx="1">
+            <a:schemeClr val="accent1"/>
+          </a:effectRef>
+          <a:fontRef idx="minor">
+            <a:schemeClr val="tx1"/>
+          </a:fontRef>
+        </p:style>
+      </p:cxnSp>
+      <p:cxnSp>
+        <p:nvCxnSpPr>
+          <p:cNvPr id="23" name="Connector 22"/>
+          <p:cNvCxnSpPr/>
+          <p:nvPr/>
+        </p:nvCxnSpPr>
+        <p:spPr>
+          <a:xfrm>
+            <a:off x="10867644" y="2377440"/>
+            <a:ext cx="0" cy="292608"/>
+          </a:xfrm>
+          <a:prstGeom prst="line">
+            <a:avLst/>
+          </a:prstGeom>
+          <a:ln w="22225">
+            <a:solidFill>
+              <a:srgbClr val="64748B"/>
+            </a:solidFill>
+            <a:tailEnd type="triangle" w="med" len="med"/>
+          </a:ln>
+        </p:spPr>
+        <p:style>
+          <a:lnRef idx="2">
+            <a:schemeClr val="accent1"/>
+          </a:lnRef>
+          <a:fillRef idx="0">
+            <a:schemeClr val="accent1"/>
+          </a:fillRef>
+          <a:effectRef idx="1">
+            <a:schemeClr val="accent1"/>
+          </a:effectRef>
+          <a:fontRef idx="minor">
+            <a:schemeClr val="tx1"/>
+          </a:fontRef>
+        </p:style>
+      </p:cxnSp>
+      <p:sp>
+        <p:nvSpPr>
+          <p:cNvPr id="24" name="Rounded Rectangle 23"/>
+          <p:cNvSpPr/>
+          <p:nvPr/>
+        </p:nvSpPr>
+        <p:spPr>
+          <a:xfrm>
+            <a:off x="411480" y="4270248"/>
+            <a:ext cx="2743200" cy="2112264"/>
+          </a:xfrm>
+          <a:prstGeom prst="roundRect">
+            <a:avLst>
+              <a:gd name="adj" fmla="val 7000"/>
+            </a:avLst>
+          </a:prstGeom>
+          <a:solidFill>
+            <a:srgbClr val="0F172A"/>
+          </a:solidFill>
+          <a:ln>
+            <a:noFill/>
+          </a:ln>
+          <a:effectLst/>
+        </p:spPr>
+        <p:txBody>
+          <a:bodyPr rtlCol="0" anchor="ctr" wrap="square">
+            <a:noAutofit/>
+          </a:bodyPr>
+          <a:lstStyle/>
+          <a:p>
+            <a:pPr algn="l">
+              <a:lnSpc>
+                <a:spcPct val="95000"/>
+              </a:lnSpc>
+              <a:spcAft>
+                <a:spcPts val="300"/>
+              </a:spcAft>
+            </a:pPr>
+            <a:r>
+              <a:rPr sz="1600" b="1" i="0">
+                <a:solidFill>
+                  <a:srgbClr val="FFFFFF"/>
+                </a:solidFill>
+                <a:latin typeface="Calibri"/>
+              </a:rPr>
+              <a:t>Doctor in the loop</a:t>
+            </a:r>
+          </a:p>
+          <a:p>
+            <a:pPr algn="l" marL="146304" indent="-146304">
+              <a:lnSpc>
+                <a:spcPct val="95000"/>
+              </a:lnSpc>
+              <a:spcAft>
+                <a:spcPts val="200"/>
+              </a:spcAft>
+              <a:buClr>
+                <a:srgbClr val="FFFFFF"/>
+              </a:buClr>
+              <a:buFont typeface="Arial"/>
+              <a:buChar char="•"/>
+            </a:pPr>
+            <a:r>
+              <a:rPr sz="1400" b="0" i="0">
+                <a:solidFill>
+                  <a:srgbClr val="E2E8F0"/>
+                </a:solidFill>
+                <a:latin typeface="Calibri"/>
+              </a:rPr>
+              <a:t>Diabetologist or diabetes educator reviews the risk board, alerts and model card</a:t>
+            </a:r>
+          </a:p>
+          <a:p>
+            <a:pPr algn="l" marL="146304" indent="-146304">
+              <a:lnSpc>
+                <a:spcPct val="95000"/>
+              </a:lnSpc>
+              <a:spcAft>
+                <a:spcPts val="200"/>
+              </a:spcAft>
+              <a:buClr>
+                <a:srgbClr val="FFFFFF"/>
+              </a:buClr>
+              <a:buFont typeface="Arial"/>
+              <a:buChar char="•"/>
+            </a:pPr>
+            <a:r>
+              <a:rPr sz="1400" b="0" i="0">
+                <a:solidFill>
+                  <a:srgbClr val="E2E8F0"/>
+                </a:solidFill>
+                <a:latin typeface="Calibri"/>
+              </a:rPr>
+              <a:t>Decides the outreach: a call, a medication review</a:t>
+            </a:r>
+          </a:p>
+          <a:p>
+            <a:pPr algn="l" marL="146304" indent="-146304">
+              <a:lnSpc>
+                <a:spcPct val="95000"/>
+              </a:lnSpc>
+              <a:spcAft>
+                <a:spcPts val="200"/>
+              </a:spcAft>
+              <a:buClr>
+                <a:srgbClr val="FFFFFF"/>
+              </a:buClr>
+              <a:buFont typeface="Arial"/>
+              <a:buChar char="•"/>
+            </a:pPr>
+            <a:r>
+              <a:rPr sz="1400" b="0" i="0">
+                <a:solidFill>
+                  <a:srgbClr val="E2E8F0"/>
+                </a:solidFill>
+                <a:latin typeface="Calibri"/>
+              </a:rPr>
+              <a:t>Decision support only; no automated dosing</a:t>
+            </a:r>
+          </a:p>
+        </p:txBody>
+      </p:sp>
+      <p:sp>
+        <p:nvSpPr>
+          <p:cNvPr id="25" name="Rounded Rectangle 24"/>
+          <p:cNvSpPr/>
+          <p:nvPr/>
+        </p:nvSpPr>
+        <p:spPr>
+          <a:xfrm>
+            <a:off x="3520440" y="4270248"/>
+            <a:ext cx="3520440" cy="1005839"/>
+          </a:xfrm>
+          <a:prstGeom prst="roundRect">
+            <a:avLst>
+              <a:gd name="adj" fmla="val 7000"/>
+            </a:avLst>
+          </a:prstGeom>
+          <a:solidFill>
+            <a:srgbClr val="FFFFFF"/>
+          </a:solidFill>
+          <a:ln w="19050">
+            <a:solidFill>
+              <a:srgbClr val="0F172A"/>
+            </a:solidFill>
+          </a:ln>
+          <a:effectLst/>
+        </p:spPr>
+        <p:txBody>
+          <a:bodyPr rtlCol="0" anchor="ctr" wrap="square">
+            <a:noAutofit/>
+          </a:bodyPr>
+          <a:lstStyle/>
+          <a:p>
+            <a:pPr algn="l">
+              <a:lnSpc>
+                <a:spcPct val="95000"/>
+              </a:lnSpc>
+              <a:spcAft>
+                <a:spcPts val="300"/>
+              </a:spcAft>
+            </a:pPr>
+            <a:r>
+              <a:rPr sz="1400" b="1" i="0">
+                <a:solidFill>
+                  <a:srgbClr val="0F172A"/>
+                </a:solidFill>
+                <a:latin typeface="Calibri"/>
+              </a:rPr>
+              <a:t>(a) dashboard/app.py · Streamlit</a:t>
+            </a:r>
+          </a:p>
+          <a:p>
+            <a:pPr algn="l">
+              <a:lnSpc>
+                <a:spcPct val="95000"/>
+              </a:lnSpc>
+              <a:spcAft>
+                <a:spcPts val="100"/>
+              </a:spcAft>
+            </a:pPr>
+            <a:r>
+              <a:rPr sz="1400" b="0" i="0">
+                <a:solidFill>
+                  <a:srgbClr val="334155"/>
+                </a:solidFill>
+                <a:latin typeface="Calibri"/>
+              </a:rPr>
+              <a:t>live inference on the selected window (about 15 ms on CPU); Data Ingest runs 5 checks on uploads</a:t>
+            </a:r>
+          </a:p>
+        </p:txBody>
+      </p:sp>
+      <p:sp>
+        <p:nvSpPr>
+          <p:cNvPr id="26" name="Rounded Rectangle 25"/>
+          <p:cNvSpPr/>
+          <p:nvPr/>
+        </p:nvSpPr>
+        <p:spPr>
+          <a:xfrm>
+            <a:off x="7406640" y="4270248"/>
+            <a:ext cx="4370832" cy="1005839"/>
+          </a:xfrm>
+          <a:prstGeom prst="roundRect">
+            <a:avLst>
+              <a:gd name="adj" fmla="val 7000"/>
+            </a:avLst>
+          </a:prstGeom>
+          <a:solidFill>
+            <a:srgbClr val="FFFFFF"/>
+          </a:solidFill>
+          <a:ln w="19050">
+            <a:solidFill>
+              <a:srgbClr val="0F172A"/>
+            </a:solidFill>
+          </a:ln>
+          <a:effectLst/>
+        </p:spPr>
+        <p:txBody>
+          <a:bodyPr rtlCol="0" anchor="ctr" wrap="square">
+            <a:noAutofit/>
+          </a:bodyPr>
+          <a:lstStyle/>
+          <a:p>
+            <a:pPr algn="l">
+              <a:lnSpc>
+                <a:spcPct val="95000"/>
+              </a:lnSpc>
+              <a:spcAft>
+                <a:spcPts val="300"/>
+              </a:spcAft>
+            </a:pPr>
+            <a:r>
+              <a:rPr sz="1400" b="1" i="0">
+                <a:solidFill>
+                  <a:srgbClr val="0F172A"/>
+                </a:solidFill>
+                <a:latin typeface="Calibri"/>
+              </a:rPr>
+              <a:t>(b) build_​standalone_​dashboard.py</a:t>
+            </a:r>
+          </a:p>
+          <a:p>
+            <a:pPr algn="l">
+              <a:lnSpc>
+                <a:spcPct val="95000"/>
+              </a:lnSpc>
+              <a:spcAft>
+                <a:spcPts val="100"/>
+              </a:spcAft>
+            </a:pPr>
+            <a:r>
+              <a:rPr sz="1400" b="0" i="0">
+                <a:solidFill>
+                  <a:srgbClr val="334155"/>
+                </a:solidFill>
+                <a:latin typeface="Calibri"/>
+              </a:rPr>
+              <a:t>scores the demo patients in Python at build time and embeds the outputs</a:t>
+            </a:r>
+          </a:p>
+        </p:txBody>
+      </p:sp>
+      <p:sp>
+        <p:nvSpPr>
+          <p:cNvPr id="27" name="Rounded Rectangle 26"/>
+          <p:cNvSpPr/>
+          <p:nvPr/>
+        </p:nvSpPr>
+        <p:spPr>
+          <a:xfrm>
+            <a:off x="7406640" y="5486400"/>
+            <a:ext cx="4370832" cy="896112"/>
+          </a:xfrm>
+          <a:prstGeom prst="roundRect">
+            <a:avLst>
+              <a:gd name="adj" fmla="val 7000"/>
+            </a:avLst>
+          </a:prstGeom>
+          <a:solidFill>
+            <a:srgbClr val="E6F4F1"/>
+          </a:solidFill>
+          <a:ln>
+            <a:noFill/>
+          </a:ln>
+          <a:effectLst/>
+        </p:spPr>
+        <p:txBody>
+          <a:bodyPr rtlCol="0" anchor="ctr" wrap="square">
+            <a:noAutofit/>
+          </a:bodyPr>
+          <a:lstStyle/>
+          <a:p>
+            <a:pPr algn="l">
+              <a:lnSpc>
+                <a:spcPct val="95000"/>
+              </a:lnSpc>
+              <a:spcAft>
+                <a:spcPts val="300"/>
+              </a:spcAft>
+            </a:pPr>
+            <a:r>
+              <a:rPr sz="1400" b="1" i="0">
+                <a:solidFill>
+                  <a:srgbClr val="0F172A"/>
+                </a:solidFill>
+                <a:latin typeface="Calibri"/>
+              </a:rPr>
+              <a:t>dashboard/index.html + plotly.min.js</a:t>
+            </a:r>
+          </a:p>
+          <a:p>
+            <a:pPr algn="l">
+              <a:lnSpc>
+                <a:spcPct val="95000"/>
+              </a:lnSpc>
+              <a:spcAft>
+                <a:spcPts val="100"/>
+              </a:spcAft>
+            </a:pPr>
+            <a:r>
+              <a:rPr sz="1400" b="0" i="0">
+                <a:solidFill>
+                  <a:srgbClr val="334155"/>
+                </a:solidFill>
+                <a:latin typeface="Calibri"/>
+              </a:rPr>
+              <a:t>static replay page; no model runs in the browser; uploads get the 5 ingest checks</a:t>
+            </a:r>
+          </a:p>
+        </p:txBody>
+      </p:sp>
+      <p:sp>
+        <p:nvSpPr>
+          <p:cNvPr id="28" name="Rounded Rectangle 27"/>
+          <p:cNvSpPr/>
+          <p:nvPr/>
+        </p:nvSpPr>
+        <p:spPr>
+          <a:xfrm>
+            <a:off x="3520440" y="5486400"/>
+            <a:ext cx="3520440" cy="896112"/>
+          </a:xfrm>
+          <a:prstGeom prst="roundRect">
+            <a:avLst>
+              <a:gd name="adj" fmla="val 7000"/>
+            </a:avLst>
+          </a:prstGeom>
+          <a:solidFill>
+            <a:srgbClr val="E6F4F1"/>
+          </a:solidFill>
+          <a:ln>
+            <a:noFill/>
+          </a:ln>
+          <a:effectLst/>
+        </p:spPr>
+        <p:txBody>
+          <a:bodyPr rtlCol="0" anchor="ctr" wrap="square">
+            <a:noAutofit/>
+          </a:bodyPr>
+          <a:lstStyle/>
+          <a:p>
+            <a:pPr algn="l">
+              <a:lnSpc>
+                <a:spcPct val="95000"/>
+              </a:lnSpc>
+              <a:spcAft>
+                <a:spcPts val="300"/>
+              </a:spcAft>
+            </a:pPr>
+            <a:r>
+              <a:rPr sz="1400" b="1" i="0">
+                <a:solidFill>
+                  <a:srgbClr val="0F172A"/>
+                </a:solidFill>
+                <a:latin typeface="Calibri"/>
+              </a:rPr>
+              <a:t>public/ on Firebase Hosting</a:t>
+            </a:r>
+          </a:p>
+          <a:p>
+            <a:pPr algn="l">
+              <a:lnSpc>
+                <a:spcPct val="95000"/>
+              </a:lnSpc>
+              <a:spcAft>
+                <a:spcPts val="100"/>
+              </a:spcAft>
+            </a:pPr>
+            <a:r>
+              <a:rPr sz="1400" b="0" i="0">
+                <a:solidFill>
+                  <a:srgbClr val="334155"/>
+                </a:solidFill>
+                <a:latin typeface="Calibri"/>
+              </a:rPr>
+              <a:t>glycotwin-app.web.app, opens on a laptop or a phone</a:t>
+            </a:r>
+          </a:p>
+        </p:txBody>
+      </p:sp>
+      <p:cxnSp>
+        <p:nvCxnSpPr>
+          <p:cNvPr id="29" name="Connector 28"/>
+          <p:cNvCxnSpPr/>
+          <p:nvPr/>
+        </p:nvCxnSpPr>
+        <p:spPr>
+          <a:xfrm>
+            <a:off x="8737092" y="3584448"/>
+            <a:ext cx="0" cy="210312"/>
+          </a:xfrm>
+          <a:prstGeom prst="line">
+            <a:avLst/>
+          </a:prstGeom>
+          <a:ln w="22225">
+            <a:solidFill>
+              <a:srgbClr val="64748B"/>
+            </a:solidFill>
+          </a:ln>
+        </p:spPr>
+        <p:style>
+          <a:lnRef idx="2">
+            <a:schemeClr val="accent1"/>
+          </a:lnRef>
+          <a:fillRef idx="0">
+            <a:schemeClr val="accent1"/>
+          </a:fillRef>
+          <a:effectRef idx="1">
+            <a:schemeClr val="accent1"/>
+          </a:effectRef>
+          <a:fontRef idx="minor">
+            <a:schemeClr val="tx1"/>
+          </a:fontRef>
+        </p:style>
+      </p:cxnSp>
+      <p:cxnSp>
+        <p:nvCxnSpPr>
+          <p:cNvPr id="30" name="Connector 29"/>
+          <p:cNvCxnSpPr/>
+          <p:nvPr/>
+        </p:nvCxnSpPr>
+        <p:spPr>
+          <a:xfrm>
+            <a:off x="10867644" y="3584448"/>
+            <a:ext cx="0" cy="210312"/>
+          </a:xfrm>
+          <a:prstGeom prst="line">
+            <a:avLst/>
+          </a:prstGeom>
+          <a:ln w="22225">
+            <a:solidFill>
+              <a:srgbClr val="64748B"/>
+            </a:solidFill>
+          </a:ln>
+        </p:spPr>
+        <p:style>
+          <a:lnRef idx="2">
+            <a:schemeClr val="accent1"/>
+          </a:lnRef>
+          <a:fillRef idx="0">
+            <a:schemeClr val="accent1"/>
+          </a:fillRef>
+          <a:effectRef idx="1">
+            <a:schemeClr val="accent1"/>
+          </a:effectRef>
+          <a:fontRef idx="minor">
+            <a:schemeClr val="tx1"/>
+          </a:fontRef>
+        </p:style>
+      </p:cxnSp>
+      <p:cxnSp>
+        <p:nvCxnSpPr>
+          <p:cNvPr id="31" name="Connector 30"/>
+          <p:cNvCxnSpPr/>
+          <p:nvPr/>
+        </p:nvCxnSpPr>
+        <p:spPr>
+          <a:xfrm>
+            <a:off x="5280660" y="3794760"/>
+            <a:ext cx="5586984" cy="0"/>
+          </a:xfrm>
+          <a:prstGeom prst="line">
+            <a:avLst/>
+          </a:prstGeom>
+          <a:ln w="22225">
+            <a:solidFill>
+              <a:srgbClr val="64748B"/>
+            </a:solidFill>
+          </a:ln>
+        </p:spPr>
+        <p:style>
+          <a:lnRef idx="2">
+            <a:schemeClr val="accent1"/>
+          </a:lnRef>
+          <a:fillRef idx="0">
+            <a:schemeClr val="accent1"/>
+          </a:fillRef>
+          <a:effectRef idx="1">
+            <a:schemeClr val="accent1"/>
+          </a:effectRef>
+          <a:fontRef idx="minor">
+            <a:schemeClr val="tx1"/>
+          </a:fontRef>
+        </p:style>
+      </p:cxnSp>
+      <p:cxnSp>
+        <p:nvCxnSpPr>
+          <p:cNvPr id="32" name="Connector 31"/>
+          <p:cNvCxnSpPr/>
+          <p:nvPr/>
+        </p:nvCxnSpPr>
+        <p:spPr>
+          <a:xfrm>
+            <a:off x="5280660" y="3794760"/>
+            <a:ext cx="0" cy="475488"/>
+          </a:xfrm>
+          <a:prstGeom prst="line">
+            <a:avLst/>
+          </a:prstGeom>
+          <a:ln w="22225">
+            <a:solidFill>
+              <a:srgbClr val="64748B"/>
+            </a:solidFill>
+            <a:tailEnd type="triangle" w="med" len="med"/>
+          </a:ln>
+        </p:spPr>
+        <p:style>
+          <a:lnRef idx="2">
+            <a:schemeClr val="accent1"/>
+          </a:lnRef>
+          <a:fillRef idx="0">
+            <a:schemeClr val="accent1"/>
+          </a:fillRef>
+          <a:effectRef idx="1">
+            <a:schemeClr val="accent1"/>
+          </a:effectRef>
+          <a:fontRef idx="minor">
+            <a:schemeClr val="tx1"/>
+          </a:fontRef>
+        </p:style>
+      </p:cxnSp>
+      <p:cxnSp>
+        <p:nvCxnSpPr>
+          <p:cNvPr id="33" name="Connector 32"/>
+          <p:cNvCxnSpPr/>
+          <p:nvPr/>
+        </p:nvCxnSpPr>
+        <p:spPr>
+          <a:xfrm>
+            <a:off x="9592056" y="3794760"/>
+            <a:ext cx="0" cy="475488"/>
+          </a:xfrm>
+          <a:prstGeom prst="line">
+            <a:avLst/>
+          </a:prstGeom>
+          <a:ln w="22225">
+            <a:solidFill>
+              <a:srgbClr val="64748B"/>
+            </a:solidFill>
+            <a:tailEnd type="triangle" w="med" len="med"/>
+          </a:ln>
+        </p:spPr>
+        <p:style>
+          <a:lnRef idx="2">
+            <a:schemeClr val="accent1"/>
+          </a:lnRef>
+          <a:fillRef idx="0">
+            <a:schemeClr val="accent1"/>
+          </a:fillRef>
+          <a:effectRef idx="1">
+            <a:schemeClr val="accent1"/>
+          </a:effectRef>
+          <a:fontRef idx="minor">
+            <a:schemeClr val="tx1"/>
+          </a:fontRef>
+        </p:style>
+      </p:cxnSp>
+      <p:sp>
+        <p:nvSpPr>
+          <p:cNvPr id="34" name="TextBox 33"/>
           <p:cNvSpPr txBox="1"/>
           <p:nvPr/>
         </p:nvSpPr>
         <p:spPr>
           <a:xfrm>
-            <a:off x="9098280" y="1600200"/>
-            <a:ext cx="2240280" cy="4572000"/>
+            <a:off x="2446020" y="3639312"/>
+            <a:ext cx="2743200" cy="310896"/>
           </a:xfrm>
           <a:prstGeom prst="rect">
             <a:avLst/>
@@ -3924,125 +4809,1996 @@
           <a:noFill/>
         </p:spPr>
         <p:txBody>
-          <a:bodyPr wrap="none">
-            <a:spAutoFit/>
+          <a:bodyPr wrap="square" lIns="36576" rIns="36576" tIns="36576" bIns="36576" anchor="t">
+            <a:noAutofit/>
           </a:bodyPr>
           <a:lstStyle/>
           <a:p>
-            <a:pPr>
-              <a:defRPr sz="1200" b="1">
+            <a:pPr algn="r">
+              <a:spcAft>
+                <a:spcPts val="0"/>
+              </a:spcAft>
+            </a:pPr>
+            <a:r>
+              <a:rPr sz="1200" b="0" i="0">
+                <a:solidFill>
+                  <a:srgbClr val="64748B"/>
+                </a:solidFill>
+                <a:latin typeface="Calibri"/>
+              </a:rPr>
+              <a:t>bundle + metrics.json →</a:t>
+            </a:r>
+          </a:p>
+        </p:txBody>
+      </p:sp>
+      <p:cxnSp>
+        <p:nvCxnSpPr>
+          <p:cNvPr id="35" name="Connector 34"/>
+          <p:cNvCxnSpPr/>
+          <p:nvPr/>
+        </p:nvCxnSpPr>
+        <p:spPr>
+          <a:xfrm>
+            <a:off x="9592056" y="5276088"/>
+            <a:ext cx="0" cy="210312"/>
+          </a:xfrm>
+          <a:prstGeom prst="line">
+            <a:avLst/>
+          </a:prstGeom>
+          <a:ln w="22225">
+            <a:solidFill>
+              <a:srgbClr val="64748B"/>
+            </a:solidFill>
+            <a:tailEnd type="triangle" w="med" len="med"/>
+          </a:ln>
+        </p:spPr>
+        <p:style>
+          <a:lnRef idx="2">
+            <a:schemeClr val="accent1"/>
+          </a:lnRef>
+          <a:fillRef idx="0">
+            <a:schemeClr val="accent1"/>
+          </a:fillRef>
+          <a:effectRef idx="1">
+            <a:schemeClr val="accent1"/>
+          </a:effectRef>
+          <a:fontRef idx="minor">
+            <a:schemeClr val="tx1"/>
+          </a:fontRef>
+        </p:style>
+      </p:cxnSp>
+      <p:cxnSp>
+        <p:nvCxnSpPr>
+          <p:cNvPr id="36" name="Connector 35"/>
+          <p:cNvCxnSpPr/>
+          <p:nvPr/>
+        </p:nvCxnSpPr>
+        <p:spPr>
+          <a:xfrm flipH="1">
+            <a:off x="7040880" y="5934456"/>
+            <a:ext cx="365760" cy="0"/>
+          </a:xfrm>
+          <a:prstGeom prst="line">
+            <a:avLst/>
+          </a:prstGeom>
+          <a:ln w="22225">
+            <a:solidFill>
+              <a:srgbClr val="64748B"/>
+            </a:solidFill>
+            <a:tailEnd type="triangle" w="med" len="med"/>
+          </a:ln>
+        </p:spPr>
+        <p:style>
+          <a:lnRef idx="2">
+            <a:schemeClr val="accent1"/>
+          </a:lnRef>
+          <a:fillRef idx="0">
+            <a:schemeClr val="accent1"/>
+          </a:fillRef>
+          <a:effectRef idx="1">
+            <a:schemeClr val="accent1"/>
+          </a:effectRef>
+          <a:fontRef idx="minor">
+            <a:schemeClr val="tx1"/>
+          </a:fontRef>
+        </p:style>
+      </p:cxnSp>
+      <p:cxnSp>
+        <p:nvCxnSpPr>
+          <p:cNvPr id="37" name="Connector 36"/>
+          <p:cNvCxnSpPr/>
+          <p:nvPr/>
+        </p:nvCxnSpPr>
+        <p:spPr>
+          <a:xfrm flipH="1">
+            <a:off x="3154680" y="5934456"/>
+            <a:ext cx="365760" cy="0"/>
+          </a:xfrm>
+          <a:prstGeom prst="line">
+            <a:avLst/>
+          </a:prstGeom>
+          <a:ln w="22225">
+            <a:solidFill>
+              <a:srgbClr val="64748B"/>
+            </a:solidFill>
+            <a:tailEnd type="triangle" w="med" len="med"/>
+          </a:ln>
+        </p:spPr>
+        <p:style>
+          <a:lnRef idx="2">
+            <a:schemeClr val="accent1"/>
+          </a:lnRef>
+          <a:fillRef idx="0">
+            <a:schemeClr val="accent1"/>
+          </a:fillRef>
+          <a:effectRef idx="1">
+            <a:schemeClr val="accent1"/>
+          </a:effectRef>
+          <a:fontRef idx="minor">
+            <a:schemeClr val="tx1"/>
+          </a:fontRef>
+        </p:style>
+      </p:cxnSp>
+      <p:cxnSp>
+        <p:nvCxnSpPr>
+          <p:cNvPr id="38" name="Connector 37"/>
+          <p:cNvCxnSpPr/>
+          <p:nvPr/>
+        </p:nvCxnSpPr>
+        <p:spPr>
+          <a:xfrm flipH="1">
+            <a:off x="3154680" y="4773168"/>
+            <a:ext cx="365760" cy="0"/>
+          </a:xfrm>
+          <a:prstGeom prst="line">
+            <a:avLst/>
+          </a:prstGeom>
+          <a:ln w="22225">
+            <a:solidFill>
+              <a:srgbClr val="64748B"/>
+            </a:solidFill>
+            <a:tailEnd type="triangle" w="med" len="med"/>
+          </a:ln>
+        </p:spPr>
+        <p:style>
+          <a:lnRef idx="2">
+            <a:schemeClr val="accent1"/>
+          </a:lnRef>
+          <a:fillRef idx="0">
+            <a:schemeClr val="accent1"/>
+          </a:fillRef>
+          <a:effectRef idx="1">
+            <a:schemeClr val="accent1"/>
+          </a:effectRef>
+          <a:fontRef idx="minor">
+            <a:schemeClr val="tx1"/>
+          </a:fontRef>
+        </p:style>
+      </p:cxnSp>
+      <p:sp>
+        <p:nvSpPr>
+          <p:cNvPr id="39" name="TextBox 38"/>
+          <p:cNvSpPr txBox="1"/>
+          <p:nvPr/>
+        </p:nvSpPr>
+        <p:spPr>
+          <a:xfrm>
+            <a:off x="411480" y="6510528"/>
+            <a:ext cx="11338560" cy="292608"/>
+          </a:xfrm>
+          <a:prstGeom prst="rect">
+            <a:avLst/>
+          </a:prstGeom>
+          <a:noFill/>
+        </p:spPr>
+        <p:txBody>
+          <a:bodyPr wrap="square" lIns="36576" rIns="36576" tIns="36576" bIns="36576" anchor="t">
+            <a:noAutofit/>
+          </a:bodyPr>
+          <a:lstStyle/>
+          <a:p>
+            <a:pPr algn="l">
+              <a:spcAft>
+                <a:spcPts val="0"/>
+              </a:spcAft>
+            </a:pPr>
+            <a:r>
+              <a:rPr sz="1100" b="0" i="0">
+                <a:solidFill>
+                  <a:srgbClr val="64748B"/>
+                </a:solidFill>
+                <a:latin typeface="Calibri"/>
+              </a:rPr>
+              <a:t>Synthetic data only · research prototype, not a medical device · not for dosing decisions</a:t>
+            </a:r>
+          </a:p>
+        </p:txBody>
+      </p:sp>
+    </p:spTree>
+  </p:cSld>
+  <p:clrMapOvr>
+    <a:masterClrMapping/>
+  </p:clrMapOvr>
+</p:sld>
+</file>
+
+<file path=ppt/slides/slide2.xml><?xml version="1.0" encoding="utf-8"?>
+<p:sld xmlns:a="http://schemas.openxmlformats.org/drawingml/2006/main" xmlns:p="http://schemas.openxmlformats.org/presentationml/2006/main" xmlns:r="http://schemas.openxmlformats.org/officeDocument/2006/relationships">
+  <p:cSld>
+    <p:bg>
+      <p:bgPr>
+        <a:solidFill>
+          <a:srgbClr val="FFFFFF"/>
+        </a:solidFill>
+        <a:effectLst/>
+      </p:bgPr>
+    </p:bg>
+    <p:spTree>
+      <p:nvGrpSpPr>
+        <p:cNvPr id="1" name=""/>
+        <p:cNvGrpSpPr/>
+        <p:nvPr/>
+      </p:nvGrpSpPr>
+      <p:grpSpPr/>
+      <p:sp>
+        <p:nvSpPr>
+          <p:cNvPr id="2" name="TextBox 1"/>
+          <p:cNvSpPr txBox="1"/>
+          <p:nvPr/>
+        </p:nvSpPr>
+        <p:spPr>
+          <a:xfrm>
+            <a:off x="411480" y="201168"/>
+            <a:ext cx="11338560" cy="548640"/>
+          </a:xfrm>
+          <a:prstGeom prst="rect">
+            <a:avLst/>
+          </a:prstGeom>
+          <a:noFill/>
+        </p:spPr>
+        <p:txBody>
+          <a:bodyPr wrap="square" lIns="36576" rIns="36576" tIns="36576" bIns="36576" anchor="t">
+            <a:noAutofit/>
+          </a:bodyPr>
+          <a:lstStyle/>
+          <a:p>
+            <a:pPr algn="l">
+              <a:spcAft>
+                <a:spcPts val="0"/>
+              </a:spcAft>
+            </a:pPr>
+            <a:r>
+              <a:rPr sz="2600" b="1" i="0">
                 <a:solidFill>
                   <a:srgbClr val="0F172A"/>
                 </a:solidFill>
-              </a:defRPr>
+                <a:latin typeface="Calibri"/>
+              </a:rPr>
+              <a:t>GlycoTwin in the care pathway: from device data to clinician action</a:t>
+            </a:r>
+          </a:p>
+        </p:txBody>
+      </p:sp>
+      <p:sp>
+        <p:nvSpPr>
+          <p:cNvPr id="3" name="TextBox 2"/>
+          <p:cNvSpPr txBox="1"/>
+          <p:nvPr/>
+        </p:nvSpPr>
+        <p:spPr>
+          <a:xfrm>
+            <a:off x="411480" y="731520"/>
+            <a:ext cx="11338560" cy="329184"/>
+          </a:xfrm>
+          <a:prstGeom prst="rect">
+            <a:avLst/>
+          </a:prstGeom>
+          <a:noFill/>
+        </p:spPr>
+        <p:txBody>
+          <a:bodyPr wrap="square" lIns="36576" rIns="36576" tIns="36576" bIns="36576" anchor="t">
+            <a:noAutofit/>
+          </a:bodyPr>
+          <a:lstStyle/>
+          <a:p>
+            <a:pPr algn="l">
+              <a:spcAft>
+                <a:spcPts val="0"/>
+              </a:spcAft>
             </a:pPr>
             <a:r>
-              <a:t>Layer 4: Clinical Interface &amp; Decision</a:t>
-            </a:r>
-          </a:p>
-          <a:p>
-            <a:pPr>
+              <a:rPr sz="1400" b="0" i="0">
+                <a:solidFill>
+                  <a:srgbClr val="64748B"/>
+                </a:solidFill>
+                <a:latin typeface="Calibri"/>
+              </a:rPr>
+              <a:t>Conceptual view of slide 1. Solid boxes run in this prototype today, on synthetic data; dashed boxes are roadmap, not built; navy boxes are people.</a:t>
+            </a:r>
+          </a:p>
+        </p:txBody>
+      </p:sp>
+      <p:sp>
+        <p:nvSpPr>
+          <p:cNvPr id="4" name="Rounded Rectangle 3"/>
+          <p:cNvSpPr/>
+          <p:nvPr/>
+        </p:nvSpPr>
+        <p:spPr>
+          <a:xfrm>
+            <a:off x="411480" y="1188720"/>
+            <a:ext cx="2532888" cy="914399"/>
+          </a:xfrm>
+          <a:prstGeom prst="roundRect">
+            <a:avLst>
+              <a:gd name="adj" fmla="val 7000"/>
+            </a:avLst>
+          </a:prstGeom>
+          <a:solidFill>
+            <a:srgbClr val="FFFFFF"/>
+          </a:solidFill>
+          <a:ln w="19050">
+            <a:solidFill>
+              <a:srgbClr val="64748B"/>
+            </a:solidFill>
+            <a:prstDash val="dash"/>
+          </a:ln>
+          <a:effectLst/>
+        </p:spPr>
+        <p:txBody>
+          <a:bodyPr rtlCol="0" anchor="ctr" wrap="square">
+            <a:noAutofit/>
+          </a:bodyPr>
+          <a:lstStyle/>
+          <a:p>
+            <a:pPr algn="l">
+              <a:lnSpc>
+                <a:spcPct val="95000"/>
+              </a:lnSpc>
               <a:spcAft>
-                <a:spcPts val="1000"/>
+                <a:spcPts val="300"/>
               </a:spcAft>
-              <a:defRPr sz="900" b="1">
-                <a:solidFill>
-                  <a:srgbClr val="10B981"/>
-                </a:solidFill>
-              </a:defRPr>
             </a:pPr>
             <a:r>
-              <a:t>ACTIONABLE INTERVENTION SUITE</a:t>
-            </a:r>
-          </a:p>
-          <a:p>
-            <a:pPr>
+              <a:rPr sz="1400" b="1" i="0">
+                <a:solidFill>
+                  <a:srgbClr val="64748B"/>
+                </a:solidFill>
+                <a:latin typeface="Calibri"/>
+              </a:rPr>
+              <a:t>Roadmap: vendor exports, APIs</a:t>
+            </a:r>
+          </a:p>
+          <a:p>
+            <a:pPr algn="l">
+              <a:lnSpc>
+                <a:spcPct val="95000"/>
+              </a:lnSpc>
               <a:spcAft>
-                <a:spcPts val="500"/>
+                <a:spcPts val="100"/>
               </a:spcAft>
-              <a:defRPr sz="1000">
+            </a:pPr>
+            <a:r>
+              <a:rPr sz="1400" b="0" i="0">
+                <a:solidFill>
+                  <a:srgbClr val="64748B"/>
+                </a:solidFill>
+                <a:latin typeface="Calibri"/>
+              </a:rPr>
+              <a:t>LibreView, Dexcom, Health Connect, HealthKit</a:t>
+            </a:r>
+          </a:p>
+        </p:txBody>
+      </p:sp>
+      <p:sp>
+        <p:nvSpPr>
+          <p:cNvPr id="5" name="Rounded Rectangle 4"/>
+          <p:cNvSpPr/>
+          <p:nvPr/>
+        </p:nvSpPr>
+        <p:spPr>
+          <a:xfrm>
+            <a:off x="3355848" y="1188720"/>
+            <a:ext cx="2532888" cy="914399"/>
+          </a:xfrm>
+          <a:prstGeom prst="roundRect">
+            <a:avLst>
+              <a:gd name="adj" fmla="val 7000"/>
+            </a:avLst>
+          </a:prstGeom>
+          <a:solidFill>
+            <a:srgbClr val="FFFFFF"/>
+          </a:solidFill>
+          <a:ln w="19050">
+            <a:solidFill>
+              <a:srgbClr val="64748B"/>
+            </a:solidFill>
+            <a:prstDash val="dash"/>
+          </a:ln>
+          <a:effectLst/>
+        </p:spPr>
+        <p:txBody>
+          <a:bodyPr rtlCol="0" anchor="ctr" wrap="square">
+            <a:noAutofit/>
+          </a:bodyPr>
+          <a:lstStyle/>
+          <a:p>
+            <a:pPr algn="l">
+              <a:lnSpc>
+                <a:spcPct val="95000"/>
+              </a:lnSpc>
+              <a:spcAft>
+                <a:spcPts val="300"/>
+              </a:spcAft>
+            </a:pPr>
+            <a:r>
+              <a:rPr sz="1400" b="1" i="0">
+                <a:solidFill>
+                  <a:srgbClr val="64748B"/>
+                </a:solidFill>
+                <a:latin typeface="Calibri"/>
+              </a:rPr>
+              <a:t>Roadmap: HL7 FHIR EHR feed</a:t>
+            </a:r>
+          </a:p>
+          <a:p>
+            <a:pPr algn="l">
+              <a:lnSpc>
+                <a:spcPct val="95000"/>
+              </a:lnSpc>
+              <a:spcAft>
+                <a:spcPts val="100"/>
+              </a:spcAft>
+            </a:pPr>
+            <a:r>
+              <a:rPr sz="1400" b="0" i="0">
+                <a:solidFill>
+                  <a:srgbClr val="64748B"/>
+                </a:solidFill>
+                <a:latin typeface="Calibri"/>
+              </a:rPr>
+              <a:t>Patient, Observation, MedicationStatement, Condition</a:t>
+            </a:r>
+          </a:p>
+        </p:txBody>
+      </p:sp>
+      <p:sp>
+        <p:nvSpPr>
+          <p:cNvPr id="6" name="Rounded Rectangle 5"/>
+          <p:cNvSpPr/>
+          <p:nvPr/>
+        </p:nvSpPr>
+        <p:spPr>
+          <a:xfrm>
+            <a:off x="6300216" y="1188720"/>
+            <a:ext cx="2532888" cy="914399"/>
+          </a:xfrm>
+          <a:prstGeom prst="roundRect">
+            <a:avLst>
+              <a:gd name="adj" fmla="val 7000"/>
+            </a:avLst>
+          </a:prstGeom>
+          <a:solidFill>
+            <a:srgbClr val="E6F4F1"/>
+          </a:solidFill>
+          <a:ln>
+            <a:noFill/>
+          </a:ln>
+          <a:effectLst/>
+        </p:spPr>
+        <p:txBody>
+          <a:bodyPr rtlCol="0" anchor="ctr" wrap="square">
+            <a:noAutofit/>
+          </a:bodyPr>
+          <a:lstStyle/>
+          <a:p>
+            <a:pPr algn="l">
+              <a:lnSpc>
+                <a:spcPct val="95000"/>
+              </a:lnSpc>
+              <a:spcAft>
+                <a:spcPts val="300"/>
+              </a:spcAft>
+            </a:pPr>
+            <a:r>
+              <a:rPr sz="1400" b="1" i="0">
+                <a:solidFill>
+                  <a:srgbClr val="0F172A"/>
+                </a:solidFill>
+                <a:latin typeface="Calibri"/>
+              </a:rPr>
+              <a:t>EHR record</a:t>
+            </a:r>
+          </a:p>
+          <a:p>
+            <a:pPr algn="l">
+              <a:lnSpc>
+                <a:spcPct val="95000"/>
+              </a:lnSpc>
+              <a:spcAft>
+                <a:spcPts val="100"/>
+              </a:spcAft>
+            </a:pPr>
+            <a:r>
+              <a:rPr sz="1400" b="0" i="0">
                 <a:solidFill>
                   <a:srgbClr val="334155"/>
                 </a:solidFill>
-              </a:defRPr>
+                <a:latin typeface="Calibri"/>
+              </a:rPr>
+              <a:t>labs, medication, history, TCF7L2; today synthetic_​ehr.csv</a:t>
+            </a:r>
+          </a:p>
+        </p:txBody>
+      </p:sp>
+      <p:sp>
+        <p:nvSpPr>
+          <p:cNvPr id="7" name="Rounded Rectangle 6"/>
+          <p:cNvSpPr/>
+          <p:nvPr/>
+        </p:nvSpPr>
+        <p:spPr>
+          <a:xfrm>
+            <a:off x="411480" y="2514600"/>
+            <a:ext cx="2532888" cy="1645919"/>
+          </a:xfrm>
+          <a:prstGeom prst="roundRect">
+            <a:avLst>
+              <a:gd name="adj" fmla="val 7000"/>
+            </a:avLst>
+          </a:prstGeom>
+          <a:solidFill>
+            <a:srgbClr val="E6F4F1"/>
+          </a:solidFill>
+          <a:ln>
+            <a:noFill/>
+          </a:ln>
+          <a:effectLst/>
+        </p:spPr>
+        <p:txBody>
+          <a:bodyPr rtlCol="0" anchor="ctr" wrap="square">
+            <a:noAutofit/>
+          </a:bodyPr>
+          <a:lstStyle/>
+          <a:p>
+            <a:pPr algn="l">
+              <a:lnSpc>
+                <a:spcPct val="95000"/>
+              </a:lnSpc>
+              <a:spcAft>
+                <a:spcPts val="300"/>
+              </a:spcAft>
             </a:pPr>
             <a:r>
-              <a:t>• Early Warning Horizon: 120-Minute Alert Notification</a:t>
-            </a:r>
-          </a:p>
-          <a:p>
-            <a:pPr>
+              <a:rPr sz="1400" b="1" i="0">
+                <a:solidFill>
+                  <a:srgbClr val="0F172A"/>
+                </a:solidFill>
+                <a:latin typeface="Calibri"/>
+              </a:rPr>
+              <a:t>CGM and wearable data</a:t>
+            </a:r>
+          </a:p>
+          <a:p>
+            <a:pPr algn="l" marL="146304" indent="-146304">
+              <a:lnSpc>
+                <a:spcPct val="95000"/>
+              </a:lnSpc>
               <a:spcAft>
-                <a:spcPts val="500"/>
+                <a:spcPts val="200"/>
               </a:spcAft>
-              <a:defRPr sz="1000">
+              <a:buClr>
+                <a:srgbClr val="0F172A"/>
+              </a:buClr>
+              <a:buFont typeface="Arial"/>
+              <a:buChar char="•"/>
+            </a:pPr>
+            <a:r>
+              <a:rPr sz="1400" b="0" i="0">
                 <a:solidFill>
                   <a:srgbClr val="334155"/>
                 </a:solidFill>
-              </a:defRPr>
+                <a:latin typeface="Calibri"/>
+              </a:rPr>
+              <a:t>glucose, heart rate, HRV, steps, sleep stage, carbs, insulin</a:t>
+            </a:r>
+          </a:p>
+          <a:p>
+            <a:pPr algn="l" marL="146304" indent="-146304">
+              <a:lnSpc>
+                <a:spcPct val="95000"/>
+              </a:lnSpc>
+              <a:spcAft>
+                <a:spcPts val="200"/>
+              </a:spcAft>
+              <a:buClr>
+                <a:srgbClr val="0F172A"/>
+              </a:buClr>
+              <a:buFont typeface="Arial"/>
+              <a:buChar char="•"/>
             </a:pPr>
             <a:r>
-              <a:t>• Actionable Protocols: 15–20g Fast-Acting Carb Rescue</a:t>
-            </a:r>
-          </a:p>
-          <a:p>
-            <a:pPr>
+              <a:rPr sz="1400" b="0" i="0">
+                <a:solidFill>
+                  <a:srgbClr val="334155"/>
+                </a:solidFill>
+                <a:latin typeface="Calibri"/>
+              </a:rPr>
+              <a:t>today synthetic_​wearables.csv or an uploaded CSV / JSON</a:t>
+            </a:r>
+          </a:p>
+        </p:txBody>
+      </p:sp>
+      <p:sp>
+        <p:nvSpPr>
+          <p:cNvPr id="8" name="Rounded Rectangle 7"/>
+          <p:cNvSpPr/>
+          <p:nvPr/>
+        </p:nvSpPr>
+        <p:spPr>
+          <a:xfrm>
+            <a:off x="3355848" y="2514600"/>
+            <a:ext cx="2532888" cy="1645919"/>
+          </a:xfrm>
+          <a:prstGeom prst="roundRect">
+            <a:avLst>
+              <a:gd name="adj" fmla="val 7000"/>
+            </a:avLst>
+          </a:prstGeom>
+          <a:solidFill>
+            <a:srgbClr val="FFFFFF"/>
+          </a:solidFill>
+          <a:ln w="19050">
+            <a:solidFill>
+              <a:srgbClr val="0F172A"/>
+            </a:solidFill>
+          </a:ln>
+          <a:effectLst/>
+        </p:spPr>
+        <p:txBody>
+          <a:bodyPr rtlCol="0" anchor="ctr" wrap="square">
+            <a:noAutofit/>
+          </a:bodyPr>
+          <a:lstStyle/>
+          <a:p>
+            <a:pPr algn="l">
+              <a:lnSpc>
+                <a:spcPct val="95000"/>
+              </a:lnSpc>
               <a:spcAft>
-                <a:spcPts val="500"/>
+                <a:spcPts val="300"/>
               </a:spcAft>
-              <a:defRPr sz="1000">
+            </a:pPr>
+            <a:r>
+              <a:rPr sz="1400" b="1" i="0">
+                <a:solidFill>
+                  <a:srgbClr val="0F172A"/>
+                </a:solidFill>
+                <a:latin typeface="Calibri"/>
+              </a:rPr>
+              <a:t>Data Ingest: 5 checks</a:t>
+            </a:r>
+          </a:p>
+          <a:p>
+            <a:pPr algn="l" marL="146304" indent="-146304">
+              <a:lnSpc>
+                <a:spcPct val="95000"/>
+              </a:lnSpc>
+              <a:spcAft>
+                <a:spcPts val="200"/>
+              </a:spcAft>
+              <a:buClr>
+                <a:srgbClr val="0F172A"/>
+              </a:buClr>
+              <a:buFont typeface="Arial"/>
+              <a:buChar char="•"/>
+            </a:pPr>
+            <a:r>
+              <a:rPr sz="1400" b="0" i="0">
                 <a:solidFill>
                   <a:srgbClr val="334155"/>
                 </a:solidFill>
-              </a:defRPr>
+                <a:latin typeface="Calibri"/>
+              </a:rPr>
+              <a:t>schema · continuity · physiological bounds · rate of change · missingness</a:t>
+            </a:r>
+          </a:p>
+          <a:p>
+            <a:pPr algn="l" marL="146304" indent="-146304">
+              <a:lnSpc>
+                <a:spcPct val="95000"/>
+              </a:lnSpc>
+              <a:spcAft>
+                <a:spcPts val="200"/>
+              </a:spcAft>
+              <a:buClr>
+                <a:srgbClr val="0F172A"/>
+              </a:buClr>
+              <a:buFont typeface="Arial"/>
+              <a:buChar char="•"/>
             </a:pPr>
             <a:r>
-              <a:t>• What-If Counterfactual Sandbox: Virtual Nutrition &amp; Insulin</a:t>
-            </a:r>
-          </a:p>
-          <a:p>
-            <a:pPr>
+              <a:rPr sz="1400" b="0" i="0">
+                <a:solidFill>
+                  <a:srgbClr val="334155"/>
+                </a:solidFill>
+                <a:latin typeface="Calibri"/>
+              </a:rPr>
+              <a:t>in both dashboards; Streamlit also scores a full-schema file</a:t>
+            </a:r>
+          </a:p>
+        </p:txBody>
+      </p:sp>
+      <p:sp>
+        <p:nvSpPr>
+          <p:cNvPr id="9" name="Rounded Rectangle 8"/>
+          <p:cNvSpPr/>
+          <p:nvPr/>
+        </p:nvSpPr>
+        <p:spPr>
+          <a:xfrm>
+            <a:off x="6300216" y="2514600"/>
+            <a:ext cx="2532888" cy="1645919"/>
+          </a:xfrm>
+          <a:prstGeom prst="roundRect">
+            <a:avLst>
+              <a:gd name="adj" fmla="val 7000"/>
+            </a:avLst>
+          </a:prstGeom>
+          <a:solidFill>
+            <a:srgbClr val="FFFFFF"/>
+          </a:solidFill>
+          <a:ln w="19050">
+            <a:solidFill>
+              <a:srgbClr val="0F766E"/>
+            </a:solidFill>
+          </a:ln>
+          <a:effectLst/>
+        </p:spPr>
+        <p:txBody>
+          <a:bodyPr rtlCol="0" anchor="ctr" wrap="square">
+            <a:noAutofit/>
+          </a:bodyPr>
+          <a:lstStyle/>
+          <a:p>
+            <a:pPr algn="l">
+              <a:lnSpc>
+                <a:spcPct val="95000"/>
+              </a:lnSpc>
               <a:spcAft>
-                <a:spcPts val="500"/>
+                <a:spcPts val="300"/>
               </a:spcAft>
-              <a:defRPr sz="1000">
+            </a:pPr>
+            <a:r>
+              <a:rPr sz="1400" b="1" i="0">
+                <a:solidFill>
+                  <a:srgbClr val="0F766E"/>
+                </a:solidFill>
+                <a:latin typeface="Calibri"/>
+              </a:rPr>
+              <a:t>Feature fusion</a:t>
+            </a:r>
+          </a:p>
+          <a:p>
+            <a:pPr algn="l" marL="146304" indent="-146304">
+              <a:lnSpc>
+                <a:spcPct val="95000"/>
+              </a:lnSpc>
+              <a:spcAft>
+                <a:spcPts val="200"/>
+              </a:spcAft>
+              <a:buClr>
+                <a:srgbClr val="0F766E"/>
+              </a:buClr>
+              <a:buFont typeface="Arial"/>
+              <a:buChar char="•"/>
+            </a:pPr>
+            <a:r>
+              <a:rPr sz="1400" b="0" i="0">
                 <a:solidFill>
                   <a:srgbClr val="334155"/>
                 </a:solidFill>
-              </a:defRPr>
+                <a:latin typeface="Calibri"/>
+              </a:rPr>
+              <a:t>EHR joined to every 15-min window</a:t>
+            </a:r>
+          </a:p>
+          <a:p>
+            <a:pPr algn="l" marL="146304" indent="-146304">
+              <a:lnSpc>
+                <a:spcPct val="95000"/>
+              </a:lnSpc>
+              <a:spcAft>
+                <a:spcPts val="200"/>
+              </a:spcAft>
+              <a:buClr>
+                <a:srgbClr val="0F766E"/>
+              </a:buClr>
+              <a:buFont typeface="Arial"/>
+              <a:buChar char="•"/>
             </a:pPr>
             <a:r>
-              <a:t>• 5-Step Ingestion Audit: Schema, Continuity, Range Validation</a:t>
-            </a:r>
-          </a:p>
-          <a:p>
-            <a:pPr>
+              <a:rPr sz="1400" b="0" i="0">
+                <a:solidFill>
+                  <a:srgbClr val="334155"/>
+                </a:solidFill>
+                <a:latin typeface="Calibri"/>
+              </a:rPr>
+              <a:t>34 features = 18 wearable + 16 EHR</a:t>
+            </a:r>
+          </a:p>
+          <a:p>
+            <a:pPr algn="l" marL="146304" indent="-146304">
+              <a:lnSpc>
+                <a:spcPct val="95000"/>
+              </a:lnSpc>
               <a:spcAft>
-                <a:spcPts val="500"/>
+                <a:spcPts val="200"/>
               </a:spcAft>
-              <a:defRPr sz="1000">
+              <a:buClr>
+                <a:srgbClr val="0F766E"/>
+              </a:buClr>
+              <a:buFont typeface="Arial"/>
+              <a:buChar char="•"/>
+            </a:pPr>
+            <a:r>
+              <a:rPr sz="1400" b="0" i="0">
                 <a:solidFill>
                   <a:srgbClr val="334155"/>
                 </a:solidFill>
-              </a:defRPr>
+                <a:latin typeface="Calibri"/>
+              </a:rPr>
+              <a:t>current and past data only</a:t>
+            </a:r>
+          </a:p>
+        </p:txBody>
+      </p:sp>
+      <p:sp>
+        <p:nvSpPr>
+          <p:cNvPr id="10" name="Rounded Rectangle 9"/>
+          <p:cNvSpPr/>
+          <p:nvPr/>
+        </p:nvSpPr>
+        <p:spPr>
+          <a:xfrm>
+            <a:off x="9244584" y="2514600"/>
+            <a:ext cx="2532888" cy="1645919"/>
+          </a:xfrm>
+          <a:prstGeom prst="roundRect">
+            <a:avLst>
+              <a:gd name="adj" fmla="val 7000"/>
+            </a:avLst>
+          </a:prstGeom>
+          <a:solidFill>
+            <a:srgbClr val="FFFFFF"/>
+          </a:solidFill>
+          <a:ln w="19050">
+            <a:solidFill>
+              <a:srgbClr val="0F766E"/>
+            </a:solidFill>
+          </a:ln>
+          <a:effectLst/>
+        </p:spPr>
+        <p:txBody>
+          <a:bodyPr rtlCol="0" anchor="ctr" wrap="square">
+            <a:noAutofit/>
+          </a:bodyPr>
+          <a:lstStyle/>
+          <a:p>
+            <a:pPr algn="l">
+              <a:lnSpc>
+                <a:spcPct val="95000"/>
+              </a:lnSpc>
+              <a:spcAft>
+                <a:spcPts val="300"/>
+              </a:spcAft>
             </a:pPr>
             <a:r>
-              <a:t>• Cohort Stratification: ADA 7.0% Target &amp; High-Risk Triage</a:t>
-            </a:r>
-          </a:p>
-          <a:p>
-            <a:pPr>
+              <a:rPr sz="1400" b="1" i="0">
+                <a:solidFill>
+                  <a:srgbClr val="0F766E"/>
+                </a:solidFill>
+                <a:latin typeface="Calibri"/>
+              </a:rPr>
+              <a:t>Twin models</a:t>
+            </a:r>
+          </a:p>
+          <a:p>
+            <a:pPr algn="l" marL="146304" indent="-146304">
+              <a:lnSpc>
+                <a:spcPct val="95000"/>
+              </a:lnSpc>
               <a:spcAft>
-                <a:spcPts val="500"/>
+                <a:spcPts val="200"/>
               </a:spcAft>
-              <a:defRPr sz="1000">
+              <a:buClr>
+                <a:srgbClr val="0F766E"/>
+              </a:buClr>
+              <a:buFont typeface="Arial"/>
+              <a:buChar char="•"/>
+            </a:pPr>
+            <a:r>
+              <a:rPr sz="1400" b="0" i="0">
                 <a:solidFill>
                   <a:srgbClr val="334155"/>
                 </a:solidFill>
-              </a:defRPr>
+                <a:latin typeface="Calibri"/>
+              </a:rPr>
+              <a:t>classifier: any reading &lt;70 or &gt;250 mg/dL in the next 2 h?</a:t>
+            </a:r>
+          </a:p>
+          <a:p>
+            <a:pPr algn="l" marL="146304" indent="-146304">
+              <a:lnSpc>
+                <a:spcPct val="95000"/>
+              </a:lnSpc>
+              <a:spcAft>
+                <a:spcPts val="200"/>
+              </a:spcAft>
+              <a:buClr>
+                <a:srgbClr val="0F766E"/>
+              </a:buClr>
+              <a:buFont typeface="Arial"/>
+              <a:buChar char="•"/>
             </a:pPr>
             <a:r>
-              <a:t>• Live Web Deployment: Globally Cached at glycotwin-app.web.app</a:t>
+              <a:rPr sz="1400" b="0" i="0">
+                <a:solidFill>
+                  <a:srgbClr val="334155"/>
+                </a:solidFill>
+                <a:latin typeface="Calibri"/>
+              </a:rPr>
+              <a:t>regressor: glucose at +2 h</a:t>
+            </a:r>
+          </a:p>
+          <a:p>
+            <a:pPr algn="l" marL="146304" indent="-146304">
+              <a:lnSpc>
+                <a:spcPct val="95000"/>
+              </a:lnSpc>
+              <a:spcAft>
+                <a:spcPts val="200"/>
+              </a:spcAft>
+              <a:buClr>
+                <a:srgbClr val="0F766E"/>
+              </a:buClr>
+              <a:buFont typeface="Arial"/>
+              <a:buChar char="•"/>
+            </a:pPr>
+            <a:r>
+              <a:rPr sz="1400" b="0" i="0">
+                <a:solidFill>
+                  <a:srgbClr val="334155"/>
+                </a:solidFill>
+                <a:latin typeface="Calibri"/>
+              </a:rPr>
+              <a:t>uncalibrated risk scores vs fixed thresholds</a:t>
+            </a:r>
+          </a:p>
+        </p:txBody>
+      </p:sp>
+      <p:sp>
+        <p:nvSpPr>
+          <p:cNvPr id="11" name="Rounded Rectangle 10"/>
+          <p:cNvSpPr/>
+          <p:nvPr/>
+        </p:nvSpPr>
+        <p:spPr>
+          <a:xfrm>
+            <a:off x="9244584" y="4572000"/>
+            <a:ext cx="2532888" cy="1645919"/>
+          </a:xfrm>
+          <a:prstGeom prst="roundRect">
+            <a:avLst>
+              <a:gd name="adj" fmla="val 7000"/>
+            </a:avLst>
+          </a:prstGeom>
+          <a:solidFill>
+            <a:srgbClr val="FFFFFF"/>
+          </a:solidFill>
+          <a:ln w="19050">
+            <a:solidFill>
+              <a:srgbClr val="0F172A"/>
+            </a:solidFill>
+          </a:ln>
+          <a:effectLst/>
+        </p:spPr>
+        <p:txBody>
+          <a:bodyPr rtlCol="0" anchor="ctr" wrap="square">
+            <a:noAutofit/>
+          </a:bodyPr>
+          <a:lstStyle/>
+          <a:p>
+            <a:pPr algn="l">
+              <a:lnSpc>
+                <a:spcPct val="95000"/>
+              </a:lnSpc>
+              <a:spcAft>
+                <a:spcPts val="300"/>
+              </a:spcAft>
+            </a:pPr>
+            <a:r>
+              <a:rPr sz="1400" b="1" i="0">
+                <a:solidFill>
+                  <a:srgbClr val="0F172A"/>
+                </a:solidFill>
+                <a:latin typeface="Calibri"/>
+              </a:rPr>
+              <a:t>Risk board and alerts</a:t>
+            </a:r>
+          </a:p>
+          <a:p>
+            <a:pPr algn="l" marL="146304" indent="-146304">
+              <a:lnSpc>
+                <a:spcPct val="95000"/>
+              </a:lnSpc>
+              <a:spcAft>
+                <a:spcPts val="200"/>
+              </a:spcAft>
+              <a:buClr>
+                <a:srgbClr val="0F172A"/>
+              </a:buClr>
+              <a:buFont typeface="Arial"/>
+              <a:buChar char="•"/>
+            </a:pPr>
+            <a:r>
+              <a:rPr sz="1400" b="0" i="0">
+                <a:solidFill>
+                  <a:srgbClr val="334155"/>
+                </a:solidFill>
+                <a:latin typeface="Calibri"/>
+              </a:rPr>
+              <a:t>patients ranked by risk score</a:t>
+            </a:r>
+          </a:p>
+          <a:p>
+            <a:pPr algn="l" marL="146304" indent="-146304">
+              <a:lnSpc>
+                <a:spcPct val="95000"/>
+              </a:lnSpc>
+              <a:spcAft>
+                <a:spcPts val="200"/>
+              </a:spcAft>
+              <a:buClr>
+                <a:srgbClr val="0F172A"/>
+              </a:buClr>
+              <a:buFont typeface="Arial"/>
+              <a:buChar char="•"/>
+            </a:pPr>
+            <a:r>
+              <a:rPr sz="1400" b="0" i="0">
+                <a:solidFill>
+                  <a:srgbClr val="334155"/>
+                </a:solidFill>
+                <a:latin typeface="Calibri"/>
+              </a:rPr>
+              <a:t>Live Monitor: last 8 h of CGM, the +2 h forecast and the alert</a:t>
+            </a:r>
+          </a:p>
+        </p:txBody>
+      </p:sp>
+      <p:sp>
+        <p:nvSpPr>
+          <p:cNvPr id="12" name="Rounded Rectangle 11"/>
+          <p:cNvSpPr/>
+          <p:nvPr/>
+        </p:nvSpPr>
+        <p:spPr>
+          <a:xfrm>
+            <a:off x="6300216" y="4572000"/>
+            <a:ext cx="2532888" cy="1645919"/>
+          </a:xfrm>
+          <a:prstGeom prst="roundRect">
+            <a:avLst>
+              <a:gd name="adj" fmla="val 7000"/>
+            </a:avLst>
+          </a:prstGeom>
+          <a:solidFill>
+            <a:srgbClr val="0F172A"/>
+          </a:solidFill>
+          <a:ln>
+            <a:noFill/>
+          </a:ln>
+          <a:effectLst/>
+        </p:spPr>
+        <p:txBody>
+          <a:bodyPr rtlCol="0" anchor="ctr" wrap="square">
+            <a:noAutofit/>
+          </a:bodyPr>
+          <a:lstStyle/>
+          <a:p>
+            <a:pPr algn="l">
+              <a:lnSpc>
+                <a:spcPct val="95000"/>
+              </a:lnSpc>
+              <a:spcAft>
+                <a:spcPts val="300"/>
+              </a:spcAft>
+            </a:pPr>
+            <a:r>
+              <a:rPr sz="1400" b="1" i="0">
+                <a:solidFill>
+                  <a:srgbClr val="FFFFFF"/>
+                </a:solidFill>
+                <a:latin typeface="Calibri"/>
+              </a:rPr>
+              <a:t>Clinician review</a:t>
+            </a:r>
+          </a:p>
+          <a:p>
+            <a:pPr algn="l" marL="146304" indent="-146304">
+              <a:lnSpc>
+                <a:spcPct val="95000"/>
+              </a:lnSpc>
+              <a:spcAft>
+                <a:spcPts val="200"/>
+              </a:spcAft>
+              <a:buClr>
+                <a:srgbClr val="FFFFFF"/>
+              </a:buClr>
+              <a:buFont typeface="Arial"/>
+              <a:buChar char="•"/>
+            </a:pPr>
+            <a:r>
+              <a:rPr sz="1400" b="0" i="0">
+                <a:solidFill>
+                  <a:srgbClr val="E2E8F0"/>
+                </a:solidFill>
+                <a:latin typeface="Calibri"/>
+              </a:rPr>
+              <a:t>diabetologist or diabetes educator decides whether and how to act</a:t>
+            </a:r>
+          </a:p>
+          <a:p>
+            <a:pPr algn="l" marL="146304" indent="-146304">
+              <a:lnSpc>
+                <a:spcPct val="95000"/>
+              </a:lnSpc>
+              <a:spcAft>
+                <a:spcPts val="200"/>
+              </a:spcAft>
+              <a:buClr>
+                <a:srgbClr val="FFFFFF"/>
+              </a:buClr>
+              <a:buFont typeface="Arial"/>
+              <a:buChar char="•"/>
+            </a:pPr>
+            <a:r>
+              <a:rPr sz="1400" b="0" i="0">
+                <a:solidFill>
+                  <a:srgbClr val="E2E8F0"/>
+                </a:solidFill>
+                <a:latin typeface="Calibri"/>
+              </a:rPr>
+              <a:t>decision support only</a:t>
+            </a:r>
+          </a:p>
+        </p:txBody>
+      </p:sp>
+      <p:sp>
+        <p:nvSpPr>
+          <p:cNvPr id="13" name="Rounded Rectangle 12"/>
+          <p:cNvSpPr/>
+          <p:nvPr/>
+        </p:nvSpPr>
+        <p:spPr>
+          <a:xfrm>
+            <a:off x="3355848" y="4572000"/>
+            <a:ext cx="2532888" cy="1645919"/>
+          </a:xfrm>
+          <a:prstGeom prst="roundRect">
+            <a:avLst>
+              <a:gd name="adj" fmla="val 7000"/>
+            </a:avLst>
+          </a:prstGeom>
+          <a:solidFill>
+            <a:srgbClr val="0F172A"/>
+          </a:solidFill>
+          <a:ln>
+            <a:noFill/>
+          </a:ln>
+          <a:effectLst/>
+        </p:spPr>
+        <p:txBody>
+          <a:bodyPr rtlCol="0" anchor="ctr" wrap="square">
+            <a:noAutofit/>
+          </a:bodyPr>
+          <a:lstStyle/>
+          <a:p>
+            <a:pPr algn="l">
+              <a:lnSpc>
+                <a:spcPct val="95000"/>
+              </a:lnSpc>
+              <a:spcAft>
+                <a:spcPts val="300"/>
+              </a:spcAft>
+            </a:pPr>
+            <a:r>
+              <a:rPr sz="1400" b="1" i="0">
+                <a:solidFill>
+                  <a:srgbClr val="FFFFFF"/>
+                </a:solidFill>
+                <a:latin typeface="Calibri"/>
+              </a:rPr>
+              <a:t>Outreach by the care team</a:t>
+            </a:r>
+          </a:p>
+          <a:p>
+            <a:pPr algn="l" marL="146304" indent="-146304">
+              <a:lnSpc>
+                <a:spcPct val="95000"/>
+              </a:lnSpc>
+              <a:spcAft>
+                <a:spcPts val="200"/>
+              </a:spcAft>
+              <a:buClr>
+                <a:srgbClr val="FFFFFF"/>
+              </a:buClr>
+              <a:buFont typeface="Arial"/>
+              <a:buChar char="•"/>
+            </a:pPr>
+            <a:r>
+              <a:rPr sz="1400" b="0" i="0">
+                <a:solidFill>
+                  <a:srgbClr val="E2E8F0"/>
+                </a:solidFill>
+                <a:latin typeface="Calibri"/>
+              </a:rPr>
+              <a:t>a call or a medication-timing review; predicted low: consider a snack</a:t>
+            </a:r>
+          </a:p>
+          <a:p>
+            <a:pPr algn="l" marL="146304" indent="-146304">
+              <a:lnSpc>
+                <a:spcPct val="95000"/>
+              </a:lnSpc>
+              <a:spcAft>
+                <a:spcPts val="200"/>
+              </a:spcAft>
+              <a:buClr>
+                <a:srgbClr val="FFFFFF"/>
+              </a:buClr>
+              <a:buFont typeface="Arial"/>
+              <a:buChar char="•"/>
+            </a:pPr>
+            <a:r>
+              <a:rPr sz="1400" b="0" i="0">
+                <a:solidFill>
+                  <a:srgbClr val="E2E8F0"/>
+                </a:solidFill>
+                <a:latin typeface="Calibri"/>
+              </a:rPr>
+              <a:t>no insulin dose advice</a:t>
+            </a:r>
+          </a:p>
+        </p:txBody>
+      </p:sp>
+      <p:sp>
+        <p:nvSpPr>
+          <p:cNvPr id="14" name="Rounded Rectangle 13"/>
+          <p:cNvSpPr/>
+          <p:nvPr/>
+        </p:nvSpPr>
+        <p:spPr>
+          <a:xfrm>
+            <a:off x="411480" y="4572000"/>
+            <a:ext cx="2532888" cy="1645919"/>
+          </a:xfrm>
+          <a:prstGeom prst="roundRect">
+            <a:avLst>
+              <a:gd name="adj" fmla="val 7000"/>
+            </a:avLst>
+          </a:prstGeom>
+          <a:solidFill>
+            <a:srgbClr val="0F172A"/>
+          </a:solidFill>
+          <a:ln>
+            <a:noFill/>
+          </a:ln>
+          <a:effectLst/>
+        </p:spPr>
+        <p:txBody>
+          <a:bodyPr rtlCol="0" anchor="ctr" wrap="square">
+            <a:noAutofit/>
+          </a:bodyPr>
+          <a:lstStyle/>
+          <a:p>
+            <a:pPr algn="l">
+              <a:lnSpc>
+                <a:spcPct val="95000"/>
+              </a:lnSpc>
+              <a:spcAft>
+                <a:spcPts val="300"/>
+              </a:spcAft>
+            </a:pPr>
+            <a:r>
+              <a:rPr sz="1400" b="1" i="0">
+                <a:solidFill>
+                  <a:srgbClr val="FFFFFF"/>
+                </a:solidFill>
+                <a:latin typeface="Calibri"/>
+              </a:rPr>
+              <a:t>Patient</a:t>
+            </a:r>
+          </a:p>
+          <a:p>
+            <a:pPr algn="l">
+              <a:lnSpc>
+                <a:spcPct val="95000"/>
+              </a:lnSpc>
+              <a:spcAft>
+                <a:spcPts val="100"/>
+              </a:spcAft>
+            </a:pPr>
+            <a:r>
+              <a:rPr sz="1400" b="0" i="0">
+                <a:solidFill>
+                  <a:srgbClr val="E2E8F0"/>
+                </a:solidFill>
+                <a:latin typeface="Calibri"/>
+              </a:rPr>
+              <a:t>keeps wearing the CGM and wearable; new readings every 15 min</a:t>
+            </a:r>
+          </a:p>
+        </p:txBody>
+      </p:sp>
+      <p:cxnSp>
+        <p:nvCxnSpPr>
+          <p:cNvPr id="15" name="Connector 14"/>
+          <p:cNvCxnSpPr/>
+          <p:nvPr/>
+        </p:nvCxnSpPr>
+        <p:spPr>
+          <a:xfrm>
+            <a:off x="1677924" y="2103120"/>
+            <a:ext cx="0" cy="411480"/>
+          </a:xfrm>
+          <a:prstGeom prst="line">
+            <a:avLst/>
+          </a:prstGeom>
+          <a:ln w="19050">
+            <a:solidFill>
+              <a:srgbClr val="64748B"/>
+            </a:solidFill>
+            <a:prstDash val="dash"/>
+            <a:tailEnd type="triangle" w="med" len="med"/>
+          </a:ln>
+        </p:spPr>
+        <p:style>
+          <a:lnRef idx="2">
+            <a:schemeClr val="accent1"/>
+          </a:lnRef>
+          <a:fillRef idx="0">
+            <a:schemeClr val="accent1"/>
+          </a:fillRef>
+          <a:effectRef idx="1">
+            <a:schemeClr val="accent1"/>
+          </a:effectRef>
+          <a:fontRef idx="minor">
+            <a:schemeClr val="tx1"/>
+          </a:fontRef>
+        </p:style>
+      </p:cxnSp>
+      <p:cxnSp>
+        <p:nvCxnSpPr>
+          <p:cNvPr id="16" name="Connector 15"/>
+          <p:cNvCxnSpPr/>
+          <p:nvPr/>
+        </p:nvCxnSpPr>
+        <p:spPr>
+          <a:xfrm>
+            <a:off x="5888736" y="1645919"/>
+            <a:ext cx="411480" cy="0"/>
+          </a:xfrm>
+          <a:prstGeom prst="line">
+            <a:avLst/>
+          </a:prstGeom>
+          <a:ln w="19050">
+            <a:solidFill>
+              <a:srgbClr val="64748B"/>
+            </a:solidFill>
+            <a:prstDash val="dash"/>
+            <a:tailEnd type="triangle" w="med" len="med"/>
+          </a:ln>
+        </p:spPr>
+        <p:style>
+          <a:lnRef idx="2">
+            <a:schemeClr val="accent1"/>
+          </a:lnRef>
+          <a:fillRef idx="0">
+            <a:schemeClr val="accent1"/>
+          </a:fillRef>
+          <a:effectRef idx="1">
+            <a:schemeClr val="accent1"/>
+          </a:effectRef>
+          <a:fontRef idx="minor">
+            <a:schemeClr val="tx1"/>
+          </a:fontRef>
+        </p:style>
+      </p:cxnSp>
+      <p:cxnSp>
+        <p:nvCxnSpPr>
+          <p:cNvPr id="17" name="Connector 16"/>
+          <p:cNvCxnSpPr/>
+          <p:nvPr/>
+        </p:nvCxnSpPr>
+        <p:spPr>
+          <a:xfrm>
+            <a:off x="7566660" y="2103120"/>
+            <a:ext cx="0" cy="411480"/>
+          </a:xfrm>
+          <a:prstGeom prst="line">
+            <a:avLst/>
+          </a:prstGeom>
+          <a:ln w="22225">
+            <a:solidFill>
+              <a:srgbClr val="64748B"/>
+            </a:solidFill>
+            <a:tailEnd type="triangle" w="med" len="med"/>
+          </a:ln>
+        </p:spPr>
+        <p:style>
+          <a:lnRef idx="2">
+            <a:schemeClr val="accent1"/>
+          </a:lnRef>
+          <a:fillRef idx="0">
+            <a:schemeClr val="accent1"/>
+          </a:fillRef>
+          <a:effectRef idx="1">
+            <a:schemeClr val="accent1"/>
+          </a:effectRef>
+          <a:fontRef idx="minor">
+            <a:schemeClr val="tx1"/>
+          </a:fontRef>
+        </p:style>
+      </p:cxnSp>
+      <p:cxnSp>
+        <p:nvCxnSpPr>
+          <p:cNvPr id="18" name="Connector 17"/>
+          <p:cNvCxnSpPr/>
+          <p:nvPr/>
+        </p:nvCxnSpPr>
+        <p:spPr>
+          <a:xfrm>
+            <a:off x="2944368" y="3337560"/>
+            <a:ext cx="411480" cy="0"/>
+          </a:xfrm>
+          <a:prstGeom prst="line">
+            <a:avLst/>
+          </a:prstGeom>
+          <a:ln w="22225">
+            <a:solidFill>
+              <a:srgbClr val="64748B"/>
+            </a:solidFill>
+            <a:tailEnd type="triangle" w="med" len="med"/>
+          </a:ln>
+        </p:spPr>
+        <p:style>
+          <a:lnRef idx="2">
+            <a:schemeClr val="accent1"/>
+          </a:lnRef>
+          <a:fillRef idx="0">
+            <a:schemeClr val="accent1"/>
+          </a:fillRef>
+          <a:effectRef idx="1">
+            <a:schemeClr val="accent1"/>
+          </a:effectRef>
+          <a:fontRef idx="minor">
+            <a:schemeClr val="tx1"/>
+          </a:fontRef>
+        </p:style>
+      </p:cxnSp>
+      <p:cxnSp>
+        <p:nvCxnSpPr>
+          <p:cNvPr id="19" name="Connector 18"/>
+          <p:cNvCxnSpPr/>
+          <p:nvPr/>
+        </p:nvCxnSpPr>
+        <p:spPr>
+          <a:xfrm>
+            <a:off x="5888736" y="3337560"/>
+            <a:ext cx="411480" cy="0"/>
+          </a:xfrm>
+          <a:prstGeom prst="line">
+            <a:avLst/>
+          </a:prstGeom>
+          <a:ln w="22225">
+            <a:solidFill>
+              <a:srgbClr val="64748B"/>
+            </a:solidFill>
+            <a:tailEnd type="triangle" w="med" len="med"/>
+          </a:ln>
+        </p:spPr>
+        <p:style>
+          <a:lnRef idx="2">
+            <a:schemeClr val="accent1"/>
+          </a:lnRef>
+          <a:fillRef idx="0">
+            <a:schemeClr val="accent1"/>
+          </a:fillRef>
+          <a:effectRef idx="1">
+            <a:schemeClr val="accent1"/>
+          </a:effectRef>
+          <a:fontRef idx="minor">
+            <a:schemeClr val="tx1"/>
+          </a:fontRef>
+        </p:style>
+      </p:cxnSp>
+      <p:cxnSp>
+        <p:nvCxnSpPr>
+          <p:cNvPr id="20" name="Connector 19"/>
+          <p:cNvCxnSpPr/>
+          <p:nvPr/>
+        </p:nvCxnSpPr>
+        <p:spPr>
+          <a:xfrm>
+            <a:off x="8833104" y="3337560"/>
+            <a:ext cx="411480" cy="0"/>
+          </a:xfrm>
+          <a:prstGeom prst="line">
+            <a:avLst/>
+          </a:prstGeom>
+          <a:ln w="22225">
+            <a:solidFill>
+              <a:srgbClr val="64748B"/>
+            </a:solidFill>
+            <a:tailEnd type="triangle" w="med" len="med"/>
+          </a:ln>
+        </p:spPr>
+        <p:style>
+          <a:lnRef idx="2">
+            <a:schemeClr val="accent1"/>
+          </a:lnRef>
+          <a:fillRef idx="0">
+            <a:schemeClr val="accent1"/>
+          </a:fillRef>
+          <a:effectRef idx="1">
+            <a:schemeClr val="accent1"/>
+          </a:effectRef>
+          <a:fontRef idx="minor">
+            <a:schemeClr val="tx1"/>
+          </a:fontRef>
+        </p:style>
+      </p:cxnSp>
+      <p:cxnSp>
+        <p:nvCxnSpPr>
+          <p:cNvPr id="21" name="Connector 20"/>
+          <p:cNvCxnSpPr/>
+          <p:nvPr/>
+        </p:nvCxnSpPr>
+        <p:spPr>
+          <a:xfrm>
+            <a:off x="10511028" y="4160520"/>
+            <a:ext cx="0" cy="411480"/>
+          </a:xfrm>
+          <a:prstGeom prst="line">
+            <a:avLst/>
+          </a:prstGeom>
+          <a:ln w="22225">
+            <a:solidFill>
+              <a:srgbClr val="64748B"/>
+            </a:solidFill>
+            <a:tailEnd type="triangle" w="med" len="med"/>
+          </a:ln>
+        </p:spPr>
+        <p:style>
+          <a:lnRef idx="2">
+            <a:schemeClr val="accent1"/>
+          </a:lnRef>
+          <a:fillRef idx="0">
+            <a:schemeClr val="accent1"/>
+          </a:fillRef>
+          <a:effectRef idx="1">
+            <a:schemeClr val="accent1"/>
+          </a:effectRef>
+          <a:fontRef idx="minor">
+            <a:schemeClr val="tx1"/>
+          </a:fontRef>
+        </p:style>
+      </p:cxnSp>
+      <p:cxnSp>
+        <p:nvCxnSpPr>
+          <p:cNvPr id="22" name="Connector 21"/>
+          <p:cNvCxnSpPr/>
+          <p:nvPr/>
+        </p:nvCxnSpPr>
+        <p:spPr>
+          <a:xfrm flipH="1">
+            <a:off x="8833104" y="5394960"/>
+            <a:ext cx="411480" cy="0"/>
+          </a:xfrm>
+          <a:prstGeom prst="line">
+            <a:avLst/>
+          </a:prstGeom>
+          <a:ln w="22225">
+            <a:solidFill>
+              <a:srgbClr val="64748B"/>
+            </a:solidFill>
+            <a:tailEnd type="triangle" w="med" len="med"/>
+          </a:ln>
+        </p:spPr>
+        <p:style>
+          <a:lnRef idx="2">
+            <a:schemeClr val="accent1"/>
+          </a:lnRef>
+          <a:fillRef idx="0">
+            <a:schemeClr val="accent1"/>
+          </a:fillRef>
+          <a:effectRef idx="1">
+            <a:schemeClr val="accent1"/>
+          </a:effectRef>
+          <a:fontRef idx="minor">
+            <a:schemeClr val="tx1"/>
+          </a:fontRef>
+        </p:style>
+      </p:cxnSp>
+      <p:cxnSp>
+        <p:nvCxnSpPr>
+          <p:cNvPr id="23" name="Connector 22"/>
+          <p:cNvCxnSpPr/>
+          <p:nvPr/>
+        </p:nvCxnSpPr>
+        <p:spPr>
+          <a:xfrm flipH="1">
+            <a:off x="5888736" y="5394960"/>
+            <a:ext cx="411480" cy="0"/>
+          </a:xfrm>
+          <a:prstGeom prst="line">
+            <a:avLst/>
+          </a:prstGeom>
+          <a:ln w="22225">
+            <a:solidFill>
+              <a:srgbClr val="64748B"/>
+            </a:solidFill>
+            <a:tailEnd type="triangle" w="med" len="med"/>
+          </a:ln>
+        </p:spPr>
+        <p:style>
+          <a:lnRef idx="2">
+            <a:schemeClr val="accent1"/>
+          </a:lnRef>
+          <a:fillRef idx="0">
+            <a:schemeClr val="accent1"/>
+          </a:fillRef>
+          <a:effectRef idx="1">
+            <a:schemeClr val="accent1"/>
+          </a:effectRef>
+          <a:fontRef idx="minor">
+            <a:schemeClr val="tx1"/>
+          </a:fontRef>
+        </p:style>
+      </p:cxnSp>
+      <p:cxnSp>
+        <p:nvCxnSpPr>
+          <p:cNvPr id="24" name="Connector 23"/>
+          <p:cNvCxnSpPr/>
+          <p:nvPr/>
+        </p:nvCxnSpPr>
+        <p:spPr>
+          <a:xfrm flipH="1">
+            <a:off x="2944368" y="5394960"/>
+            <a:ext cx="411480" cy="0"/>
+          </a:xfrm>
+          <a:prstGeom prst="line">
+            <a:avLst/>
+          </a:prstGeom>
+          <a:ln w="22225">
+            <a:solidFill>
+              <a:srgbClr val="64748B"/>
+            </a:solidFill>
+            <a:tailEnd type="triangle" w="med" len="med"/>
+          </a:ln>
+        </p:spPr>
+        <p:style>
+          <a:lnRef idx="2">
+            <a:schemeClr val="accent1"/>
+          </a:lnRef>
+          <a:fillRef idx="0">
+            <a:schemeClr val="accent1"/>
+          </a:fillRef>
+          <a:effectRef idx="1">
+            <a:schemeClr val="accent1"/>
+          </a:effectRef>
+          <a:fontRef idx="minor">
+            <a:schemeClr val="tx1"/>
+          </a:fontRef>
+        </p:style>
+      </p:cxnSp>
+      <p:cxnSp>
+        <p:nvCxnSpPr>
+          <p:cNvPr id="25" name="Connector 24"/>
+          <p:cNvCxnSpPr/>
+          <p:nvPr/>
+        </p:nvCxnSpPr>
+        <p:spPr>
+          <a:xfrm flipV="1">
+            <a:off x="1677924" y="4160520"/>
+            <a:ext cx="0" cy="411480"/>
+          </a:xfrm>
+          <a:prstGeom prst="line">
+            <a:avLst/>
+          </a:prstGeom>
+          <a:ln w="25400">
+            <a:solidFill>
+              <a:srgbClr val="0F766E"/>
+            </a:solidFill>
+            <a:tailEnd type="triangle" w="med" len="med"/>
+          </a:ln>
+        </p:spPr>
+        <p:style>
+          <a:lnRef idx="2">
+            <a:schemeClr val="accent1"/>
+          </a:lnRef>
+          <a:fillRef idx="0">
+            <a:schemeClr val="accent1"/>
+          </a:fillRef>
+          <a:effectRef idx="1">
+            <a:schemeClr val="accent1"/>
+          </a:effectRef>
+          <a:fontRef idx="minor">
+            <a:schemeClr val="tx1"/>
+          </a:fontRef>
+        </p:style>
+      </p:cxnSp>
+      <p:sp>
+        <p:nvSpPr>
+          <p:cNvPr id="26" name="Rounded Rectangle 25"/>
+          <p:cNvSpPr/>
+          <p:nvPr/>
+        </p:nvSpPr>
+        <p:spPr>
+          <a:xfrm>
+            <a:off x="9336024" y="1207008"/>
+            <a:ext cx="384048" cy="219456"/>
+          </a:xfrm>
+          <a:prstGeom prst="roundRect">
+            <a:avLst>
+              <a:gd name="adj" fmla="val 20000"/>
+            </a:avLst>
+          </a:prstGeom>
+          <a:solidFill>
+            <a:srgbClr val="FFFFFF"/>
+          </a:solidFill>
+          <a:ln w="19050">
+            <a:solidFill>
+              <a:srgbClr val="0F172A"/>
+            </a:solidFill>
+          </a:ln>
+          <a:effectLst/>
+        </p:spPr>
+        <p:txBody>
+          <a:bodyPr rtlCol="0" anchor="t" wrap="square" lIns="128016" rIns="128016">
+            <a:noAutofit/>
+          </a:bodyPr>
+          <a:lstStyle/>
+          <a:p>
+            <a:pPr algn="ctr"/>
+          </a:p>
+        </p:txBody>
+      </p:sp>
+      <p:sp>
+        <p:nvSpPr>
+          <p:cNvPr id="27" name="TextBox 26"/>
+          <p:cNvSpPr txBox="1"/>
+          <p:nvPr/>
+        </p:nvSpPr>
+        <p:spPr>
+          <a:xfrm>
+            <a:off x="9838944" y="1170432"/>
+            <a:ext cx="1938528" cy="292608"/>
+          </a:xfrm>
+          <a:prstGeom prst="rect">
+            <a:avLst/>
+          </a:prstGeom>
+          <a:noFill/>
+        </p:spPr>
+        <p:txBody>
+          <a:bodyPr wrap="square" lIns="36576" rIns="36576" tIns="36576" bIns="36576" anchor="t">
+            <a:noAutofit/>
+          </a:bodyPr>
+          <a:lstStyle/>
+          <a:p>
+            <a:pPr algn="l">
+              <a:spcAft>
+                <a:spcPts val="0"/>
+              </a:spcAft>
+            </a:pPr>
+            <a:r>
+              <a:rPr sz="1400" b="0" i="0">
+                <a:solidFill>
+                  <a:srgbClr val="334155"/>
+                </a:solidFill>
+                <a:latin typeface="Calibri"/>
+              </a:rPr>
+              <a:t>runs in this prototype</a:t>
+            </a:r>
+          </a:p>
+        </p:txBody>
+      </p:sp>
+      <p:sp>
+        <p:nvSpPr>
+          <p:cNvPr id="28" name="Rounded Rectangle 27"/>
+          <p:cNvSpPr/>
+          <p:nvPr/>
+        </p:nvSpPr>
+        <p:spPr>
+          <a:xfrm>
+            <a:off x="9336024" y="1508760"/>
+            <a:ext cx="384048" cy="219456"/>
+          </a:xfrm>
+          <a:prstGeom prst="roundRect">
+            <a:avLst>
+              <a:gd name="adj" fmla="val 20000"/>
+            </a:avLst>
+          </a:prstGeom>
+          <a:solidFill>
+            <a:srgbClr val="FFFFFF"/>
+          </a:solidFill>
+          <a:ln w="19050">
+            <a:solidFill>
+              <a:srgbClr val="64748B"/>
+            </a:solidFill>
+            <a:prstDash val="dash"/>
+          </a:ln>
+          <a:effectLst/>
+        </p:spPr>
+        <p:txBody>
+          <a:bodyPr rtlCol="0" anchor="t" wrap="square" lIns="128016" rIns="128016">
+            <a:noAutofit/>
+          </a:bodyPr>
+          <a:lstStyle/>
+          <a:p>
+            <a:pPr algn="ctr"/>
+          </a:p>
+        </p:txBody>
+      </p:sp>
+      <p:sp>
+        <p:nvSpPr>
+          <p:cNvPr id="29" name="TextBox 28"/>
+          <p:cNvSpPr txBox="1"/>
+          <p:nvPr/>
+        </p:nvSpPr>
+        <p:spPr>
+          <a:xfrm>
+            <a:off x="9838944" y="1472184"/>
+            <a:ext cx="1938528" cy="292608"/>
+          </a:xfrm>
+          <a:prstGeom prst="rect">
+            <a:avLst/>
+          </a:prstGeom>
+          <a:noFill/>
+        </p:spPr>
+        <p:txBody>
+          <a:bodyPr wrap="square" lIns="36576" rIns="36576" tIns="36576" bIns="36576" anchor="t">
+            <a:noAutofit/>
+          </a:bodyPr>
+          <a:lstStyle/>
+          <a:p>
+            <a:pPr algn="l">
+              <a:spcAft>
+                <a:spcPts val="0"/>
+              </a:spcAft>
+            </a:pPr>
+            <a:r>
+              <a:rPr sz="1400" b="0" i="0">
+                <a:solidFill>
+                  <a:srgbClr val="334155"/>
+                </a:solidFill>
+                <a:latin typeface="Calibri"/>
+              </a:rPr>
+              <a:t>roadmap, not built</a:t>
+            </a:r>
+          </a:p>
+        </p:txBody>
+      </p:sp>
+      <p:sp>
+        <p:nvSpPr>
+          <p:cNvPr id="30" name="Rounded Rectangle 29"/>
+          <p:cNvSpPr/>
+          <p:nvPr/>
+        </p:nvSpPr>
+        <p:spPr>
+          <a:xfrm>
+            <a:off x="9336024" y="1810512"/>
+            <a:ext cx="384048" cy="219456"/>
+          </a:xfrm>
+          <a:prstGeom prst="roundRect">
+            <a:avLst>
+              <a:gd name="adj" fmla="val 20000"/>
+            </a:avLst>
+          </a:prstGeom>
+          <a:solidFill>
+            <a:srgbClr val="0F172A"/>
+          </a:solidFill>
+          <a:ln>
+            <a:noFill/>
+          </a:ln>
+          <a:effectLst/>
+        </p:spPr>
+        <p:txBody>
+          <a:bodyPr rtlCol="0" anchor="t" wrap="square" lIns="128016" rIns="128016">
+            <a:noAutofit/>
+          </a:bodyPr>
+          <a:lstStyle/>
+          <a:p>
+            <a:pPr algn="ctr"/>
+          </a:p>
+        </p:txBody>
+      </p:sp>
+      <p:sp>
+        <p:nvSpPr>
+          <p:cNvPr id="31" name="TextBox 30"/>
+          <p:cNvSpPr txBox="1"/>
+          <p:nvPr/>
+        </p:nvSpPr>
+        <p:spPr>
+          <a:xfrm>
+            <a:off x="9838944" y="1773936"/>
+            <a:ext cx="1938528" cy="292608"/>
+          </a:xfrm>
+          <a:prstGeom prst="rect">
+            <a:avLst/>
+          </a:prstGeom>
+          <a:noFill/>
+        </p:spPr>
+        <p:txBody>
+          <a:bodyPr wrap="square" lIns="36576" rIns="36576" tIns="36576" bIns="36576" anchor="t">
+            <a:noAutofit/>
+          </a:bodyPr>
+          <a:lstStyle/>
+          <a:p>
+            <a:pPr algn="l">
+              <a:spcAft>
+                <a:spcPts val="0"/>
+              </a:spcAft>
+            </a:pPr>
+            <a:r>
+              <a:rPr sz="1400" b="0" i="0">
+                <a:solidFill>
+                  <a:srgbClr val="334155"/>
+                </a:solidFill>
+                <a:latin typeface="Calibri"/>
+              </a:rPr>
+              <a:t>people</a:t>
+            </a:r>
+          </a:p>
+        </p:txBody>
+      </p:sp>
+      <p:sp>
+        <p:nvSpPr>
+          <p:cNvPr id="32" name="TextBox 31"/>
+          <p:cNvSpPr txBox="1"/>
+          <p:nvPr/>
+        </p:nvSpPr>
+        <p:spPr>
+          <a:xfrm>
+            <a:off x="411480" y="6510528"/>
+            <a:ext cx="11338560" cy="292608"/>
+          </a:xfrm>
+          <a:prstGeom prst="rect">
+            <a:avLst/>
+          </a:prstGeom>
+          <a:noFill/>
+        </p:spPr>
+        <p:txBody>
+          <a:bodyPr wrap="square" lIns="36576" rIns="36576" tIns="36576" bIns="36576" anchor="t">
+            <a:noAutofit/>
+          </a:bodyPr>
+          <a:lstStyle/>
+          <a:p>
+            <a:pPr algn="l">
+              <a:spcAft>
+                <a:spcPts val="0"/>
+              </a:spcAft>
+            </a:pPr>
+            <a:r>
+              <a:rPr sz="1100" b="0" i="0">
+                <a:solidFill>
+                  <a:srgbClr val="64748B"/>
+                </a:solidFill>
+                <a:latin typeface="Calibri"/>
+              </a:rPr>
+              <a:t>Synthetic data only · research prototype, not a medical device · not for dosing decisions</a:t>
             </a:r>
           </a:p>
         </p:txBody>
